--- a/reports/tilon_project_progress_20260323_ko.pptx
+++ b/reports/tilon_project_progress_20260323_ko.pptx
@@ -14,6 +14,7 @@
     <p:sldId id="262" r:id="rId13"/>
     <p:sldId id="263" r:id="rId14"/>
     <p:sldId id="264" r:id="rId15"/>
+    <p:sldId id="265" r:id="rId16"/>
   </p:sldIdLst>
   <p:sldSz cx="12191695" cy="6858000" type="screen4x3"/>
   <p:notesSz cx="6858000" cy="9144000"/>
@@ -3306,6 +3307,236 @@
 </p:sld>
 </file>
 
+<file path=ppt/slides/slide10.xml><?xml version="1.0" encoding="utf-8"?>
+<p:sld xmlns:a="http://schemas.openxmlformats.org/drawingml/2006/main" xmlns:p="http://schemas.openxmlformats.org/presentationml/2006/main" xmlns:r="http://schemas.openxmlformats.org/officeDocument/2006/relationships">
+  <p:cSld>
+    <p:bg>
+      <p:bgPr>
+        <a:solidFill>
+          <a:srgbClr val="0B1220"/>
+        </a:solidFill>
+        <a:effectLst/>
+      </p:bgPr>
+    </p:bg>
+    <p:spTree>
+      <p:nvGrpSpPr>
+        <p:cNvPr id="1" name=""/>
+        <p:cNvGrpSpPr/>
+        <p:nvPr/>
+      </p:nvGrpSpPr>
+      <p:grpSpPr/>
+      <p:sp>
+        <p:nvSpPr>
+          <p:cNvPr id="2" name="Rectangle 1"/>
+          <p:cNvSpPr/>
+          <p:nvPr/>
+        </p:nvSpPr>
+        <p:spPr>
+          <a:xfrm>
+            <a:off x="0" y="0"/>
+            <a:ext cx="12188952" cy="731520"/>
+          </a:xfrm>
+          <a:prstGeom prst="rect">
+            <a:avLst/>
+          </a:prstGeom>
+          <a:solidFill>
+            <a:srgbClr val="152035"/>
+          </a:solidFill>
+          <a:ln>
+            <a:noFill/>
+          </a:ln>
+        </p:spPr>
+        <p:style>
+          <a:lnRef idx="1">
+            <a:schemeClr val="accent1"/>
+          </a:lnRef>
+          <a:fillRef idx="3">
+            <a:schemeClr val="accent1"/>
+          </a:fillRef>
+          <a:effectRef idx="2">
+            <a:schemeClr val="accent1"/>
+          </a:effectRef>
+          <a:fontRef idx="minor">
+            <a:schemeClr val="lt1"/>
+          </a:fontRef>
+        </p:style>
+        <p:txBody>
+          <a:bodyPr rtlCol="0" anchor="ctr"/>
+          <a:lstStyle/>
+          <a:p>
+            <a:pPr algn="ctr"/>
+          </a:p>
+        </p:txBody>
+      </p:sp>
+      <p:sp>
+        <p:nvSpPr>
+          <p:cNvPr id="3" name="TextBox 2"/>
+          <p:cNvSpPr txBox="1"/>
+          <p:nvPr/>
+        </p:nvSpPr>
+        <p:spPr>
+          <a:xfrm>
+            <a:off x="411480" y="146304"/>
+            <a:ext cx="8046720" cy="320040"/>
+          </a:xfrm>
+          <a:prstGeom prst="rect">
+            <a:avLst/>
+          </a:prstGeom>
+          <a:noFill/>
+        </p:spPr>
+        <p:txBody>
+          <a:bodyPr wrap="none">
+            <a:spAutoFit/>
+          </a:bodyPr>
+          <a:lstStyle/>
+          <a:p>
+            <a:r>
+              <a:rPr sz="2600" b="1">
+                <a:solidFill>
+                  <a:srgbClr val="F1F5F9"/>
+                </a:solidFill>
+              </a:rPr>
+              <a:t>결론</a:t>
+            </a:r>
+          </a:p>
+        </p:txBody>
+      </p:sp>
+      <p:sp>
+        <p:nvSpPr>
+          <p:cNvPr id="4" name="Rounded Rectangle 3"/>
+          <p:cNvSpPr/>
+          <p:nvPr/>
+        </p:nvSpPr>
+        <p:spPr>
+          <a:xfrm>
+            <a:off x="822960" y="1463040"/>
+            <a:ext cx="10515600" cy="4389120"/>
+          </a:xfrm>
+          <a:prstGeom prst="roundRect">
+            <a:avLst/>
+          </a:prstGeom>
+          <a:solidFill>
+            <a:srgbClr val="152035"/>
+          </a:solidFill>
+          <a:ln>
+            <a:solidFill>
+              <a:srgbClr val="1AA39A"/>
+            </a:solidFill>
+          </a:ln>
+        </p:spPr>
+        <p:style>
+          <a:lnRef idx="1">
+            <a:schemeClr val="accent1"/>
+          </a:lnRef>
+          <a:fillRef idx="3">
+            <a:schemeClr val="accent1"/>
+          </a:fillRef>
+          <a:effectRef idx="2">
+            <a:schemeClr val="accent1"/>
+          </a:effectRef>
+          <a:fontRef idx="minor">
+            <a:schemeClr val="lt1"/>
+          </a:fontRef>
+        </p:style>
+        <p:txBody>
+          <a:bodyPr rtlCol="0" anchor="ctr"/>
+          <a:lstStyle/>
+          <a:p>
+            <a:pPr algn="ctr"/>
+          </a:p>
+        </p:txBody>
+      </p:sp>
+      <p:sp>
+        <p:nvSpPr>
+          <p:cNvPr id="5" name="TextBox 4"/>
+          <p:cNvSpPr txBox="1"/>
+          <p:nvPr/>
+        </p:nvSpPr>
+        <p:spPr>
+          <a:xfrm>
+            <a:off x="1143000" y="1828800"/>
+            <a:ext cx="9875520" cy="3566160"/>
+          </a:xfrm>
+          <a:prstGeom prst="rect">
+            <a:avLst/>
+          </a:prstGeom>
+          <a:noFill/>
+        </p:spPr>
+        <p:txBody>
+          <a:bodyPr wrap="none">
+            <a:spAutoFit/>
+          </a:bodyPr>
+          <a:lstStyle/>
+          <a:p>
+            <a:pPr>
+              <a:spcAft>
+                <a:spcPts val="1200"/>
+              </a:spcAft>
+              <a:defRPr sz="2200">
+                <a:solidFill>
+                  <a:srgbClr val="F1F5F9"/>
+                </a:solidFill>
+              </a:defRPr>
+            </a:pPr>
+            <a:r>
+              <a:t>현재 프로젝트는 초기 프로토타입 단계를 넘어서, 문서 기반 RAG 제품의 핵심 구조를 확보한 상태입니다.</a:t>
+            </a:r>
+          </a:p>
+          <a:p>
+            <a:pPr>
+              <a:spcAft>
+                <a:spcPts val="1200"/>
+              </a:spcAft>
+              <a:defRPr sz="1800">
+                <a:solidFill>
+                  <a:srgbClr val="BFCDE0"/>
+                </a:solidFill>
+              </a:defRPr>
+            </a:pPr>
+            <a:r>
+              <a:t>특히 업로드 문서 처리, 문서 스코프 QA, 벤치마크 기반 평가, 비교형 질문 지원까지 연결되었습니다.</a:t>
+            </a:r>
+          </a:p>
+          <a:p>
+            <a:pPr>
+              <a:spcAft>
+                <a:spcPts val="1200"/>
+              </a:spcAft>
+              <a:defRPr sz="1800">
+                <a:solidFill>
+                  <a:srgbClr val="BFCDE0"/>
+                </a:solidFill>
+              </a:defRPr>
+            </a:pPr>
+            <a:r>
+              <a:t>다음 핵심 과제는 한글 중심 평가셋 확대와 QLoRA 학습 루프 시작입니다.</a:t>
+            </a:r>
+          </a:p>
+          <a:p>
+            <a:pPr>
+              <a:spcAft>
+                <a:spcPts val="1200"/>
+              </a:spcAft>
+              <a:defRPr sz="1800">
+                <a:solidFill>
+                  <a:srgbClr val="BFCDE0"/>
+                </a:solidFill>
+              </a:defRPr>
+            </a:pPr>
+            <a:r>
+              <a:t>즉, 지금은 기능 추가보다 '품질 측정 -&gt; 데이터 확장 -&gt; 미세조정'으로 넘어가야 하는 시점입니다.</a:t>
+            </a:r>
+          </a:p>
+        </p:txBody>
+      </p:sp>
+    </p:spTree>
+  </p:cSld>
+  <p:clrMapOvr>
+    <a:masterClrMapping/>
+  </p:clrMapOvr>
+</p:sld>
+</file>
+
 <file path=ppt/slides/slide2.xml><?xml version="1.0" encoding="utf-8"?>
 <p:sld xmlns:a="http://schemas.openxmlformats.org/drawingml/2006/main" xmlns:p="http://schemas.openxmlformats.org/presentationml/2006/main" xmlns:r="http://schemas.openxmlformats.org/officeDocument/2006/relationships">
   <p:cSld>
@@ -3565,21 +3796,55 @@
                   <a:srgbClr val="F1F5F9"/>
                 </a:solidFill>
               </a:rPr>
-              <a:t>현재까지 구현된 핵심 기능</a:t>
-            </a:r>
-          </a:p>
-        </p:txBody>
-      </p:sp>
-      <p:sp>
-        <p:nvSpPr>
-          <p:cNvPr id="4" name="Rounded Rectangle 3"/>
+              <a:t>RAG 파이프라인</a:t>
+            </a:r>
+          </a:p>
+        </p:txBody>
+      </p:sp>
+      <p:sp>
+        <p:nvSpPr>
+          <p:cNvPr id="4" name="TextBox 3"/>
+          <p:cNvSpPr txBox="1"/>
+          <p:nvPr/>
+        </p:nvSpPr>
+        <p:spPr>
+          <a:xfrm>
+            <a:off x="8366760" y="182880"/>
+            <a:ext cx="3291840" cy="228600"/>
+          </a:xfrm>
+          <a:prstGeom prst="rect">
+            <a:avLst/>
+          </a:prstGeom>
+          <a:noFill/>
+        </p:spPr>
+        <p:txBody>
+          <a:bodyPr wrap="none">
+            <a:spAutoFit/>
+          </a:bodyPr>
+          <a:lstStyle/>
+          <a:p>
+            <a:pPr algn="r"/>
+            <a:r>
+              <a:rPr sz="1100">
+                <a:solidFill>
+                  <a:srgbClr val="BFCDE0"/>
+                </a:solidFill>
+              </a:rPr>
+              <a:t>현재 시스템의 핵심 처리 흐름</a:t>
+            </a:r>
+          </a:p>
+        </p:txBody>
+      </p:sp>
+      <p:sp>
+        <p:nvSpPr>
+          <p:cNvPr id="5" name="Rounded Rectangle 4"/>
           <p:cNvSpPr/>
           <p:nvPr/>
         </p:nvSpPr>
         <p:spPr>
           <a:xfrm>
-            <a:off x="594360" y="1143000"/>
-            <a:ext cx="5212080" cy="5303520"/>
+            <a:off x="502920" y="1371600"/>
+            <a:ext cx="1828800" cy="1417320"/>
           </a:xfrm>
           <a:prstGeom prst="roundRect">
             <a:avLst/>
@@ -3617,14 +3882,14 @@
       </p:sp>
       <p:sp>
         <p:nvSpPr>
-          <p:cNvPr id="5" name="TextBox 4"/>
+          <p:cNvPr id="6" name="TextBox 5"/>
           <p:cNvSpPr txBox="1"/>
           <p:nvPr/>
         </p:nvSpPr>
         <p:spPr>
           <a:xfrm>
-            <a:off x="822960" y="1325880"/>
-            <a:ext cx="4663440" cy="365760"/>
+            <a:off x="612648" y="1463040"/>
+            <a:ext cx="1600200" cy="256032"/>
           </a:xfrm>
           <a:prstGeom prst="rect">
             <a:avLst/>
@@ -3637,27 +3902,28 @@
           </a:bodyPr>
           <a:lstStyle/>
           <a:p>
-            <a:r>
-              <a:rPr sz="2000" b="1">
+            <a:pPr algn="ctr"/>
+            <a:r>
+              <a:rPr sz="1600" b="1">
                 <a:solidFill>
                   <a:srgbClr val="F1F5F9"/>
                 </a:solidFill>
               </a:rPr>
-              <a:t>완료된 기능</a:t>
-            </a:r>
-          </a:p>
-        </p:txBody>
-      </p:sp>
-      <p:sp>
-        <p:nvSpPr>
-          <p:cNvPr id="6" name="TextBox 5"/>
+              <a:t>1. 입력</a:t>
+            </a:r>
+          </a:p>
+        </p:txBody>
+      </p:sp>
+      <p:sp>
+        <p:nvSpPr>
+          <p:cNvPr id="7" name="TextBox 6"/>
           <p:cNvSpPr txBox="1"/>
           <p:nvPr/>
         </p:nvSpPr>
         <p:spPr>
           <a:xfrm>
-            <a:off x="850392" y="1783080"/>
-            <a:ext cx="4572000" cy="4297680"/>
+            <a:off x="612648" y="1755648"/>
+            <a:ext cx="1600200" cy="822960"/>
           </a:xfrm>
           <a:prstGeom prst="rect">
             <a:avLst/>
@@ -3665,82 +3931,68 @@
           <a:noFill/>
         </p:spPr>
         <p:txBody>
-          <a:bodyPr wrap="square">
+          <a:bodyPr wrap="none">
             <a:spAutoFit/>
           </a:bodyPr>
           <a:lstStyle/>
           <a:p>
-            <a:pPr>
-              <a:spcAft>
-                <a:spcPts val="800"/>
-              </a:spcAft>
-              <a:defRPr sz="1800">
+            <a:pPr algn="ctr"/>
+            <a:r>
+              <a:rPr sz="1100">
                 <a:solidFill>
                   <a:srgbClr val="BFCDE0"/>
                 </a:solidFill>
-              </a:defRPr>
-            </a:pPr>
-            <a:r>
-              <a:t>텍스트 PDF / 스캔 PDF / 이미지 업로드 처리</a:t>
-            </a:r>
-          </a:p>
-          <a:p>
-            <a:pPr>
-              <a:spcAft>
-                <a:spcPts val="800"/>
-              </a:spcAft>
-              <a:defRPr sz="1800">
-                <a:solidFill>
-                  <a:srgbClr val="BFCDE0"/>
-                </a:solidFill>
-              </a:defRPr>
-            </a:pPr>
-            <a:r>
-              <a:t>업로드 문서 기억 및 사이드바 재선택</a:t>
-            </a:r>
-          </a:p>
-          <a:p>
-            <a:pPr>
-              <a:spcAft>
-                <a:spcPts val="800"/>
-              </a:spcAft>
-              <a:defRPr sz="1800">
-                <a:solidFill>
-                  <a:srgbClr val="BFCDE0"/>
-                </a:solidFill>
-              </a:defRPr>
-            </a:pPr>
-            <a:r>
-              <a:t>동일 파일 재업로드 시 중복 청크 정리</a:t>
-            </a:r>
-          </a:p>
-          <a:p>
-            <a:pPr>
-              <a:spcAft>
-                <a:spcPts val="800"/>
-              </a:spcAft>
-              <a:defRPr sz="1800">
-                <a:solidFill>
-                  <a:srgbClr val="BFCDE0"/>
-                </a:solidFill>
-              </a:defRPr>
-            </a:pPr>
-            <a:r>
-              <a:t>번들 PDF 모호성 감지 및 서브지침 범위 축소</a:t>
-            </a:r>
-          </a:p>
-        </p:txBody>
-      </p:sp>
-      <p:sp>
-        <p:nvSpPr>
-          <p:cNvPr id="7" name="Rounded Rectangle 6"/>
+              </a:rPr>
+              <a:t>PDF / 스캔 PDF / 이미지 업로드
+라이브러리 문서 또는 채팅 업로드</a:t>
+            </a:r>
+          </a:p>
+        </p:txBody>
+      </p:sp>
+      <p:sp>
+        <p:nvSpPr>
+          <p:cNvPr id="8" name="TextBox 7"/>
+          <p:cNvSpPr txBox="1"/>
+          <p:nvPr/>
+        </p:nvSpPr>
+        <p:spPr>
+          <a:xfrm>
+            <a:off x="2313432" y="1883664"/>
+            <a:ext cx="182880" cy="228600"/>
+          </a:xfrm>
+          <a:prstGeom prst="rect">
+            <a:avLst/>
+          </a:prstGeom>
+          <a:noFill/>
+        </p:spPr>
+        <p:txBody>
+          <a:bodyPr wrap="none">
+            <a:spAutoFit/>
+          </a:bodyPr>
+          <a:lstStyle/>
+          <a:p>
+            <a:pPr algn="ctr"/>
+            <a:r>
+              <a:rPr sz="1800" b="1">
+                <a:solidFill>
+                  <a:srgbClr val="1AA39A"/>
+                </a:solidFill>
+              </a:rPr>
+              <a:t>→</a:t>
+            </a:r>
+          </a:p>
+        </p:txBody>
+      </p:sp>
+      <p:sp>
+        <p:nvSpPr>
+          <p:cNvPr id="9" name="Rounded Rectangle 8"/>
           <p:cNvSpPr/>
           <p:nvPr/>
         </p:nvSpPr>
         <p:spPr>
           <a:xfrm>
-            <a:off x="6309360" y="1143000"/>
-            <a:ext cx="5212080" cy="5303520"/>
+            <a:off x="2468880" y="1371600"/>
+            <a:ext cx="1828800" cy="1417320"/>
           </a:xfrm>
           <a:prstGeom prst="roundRect">
             <a:avLst/>
@@ -3778,14 +4030,14 @@
       </p:sp>
       <p:sp>
         <p:nvSpPr>
-          <p:cNvPr id="8" name="TextBox 7"/>
+          <p:cNvPr id="10" name="TextBox 9"/>
           <p:cNvSpPr txBox="1"/>
           <p:nvPr/>
         </p:nvSpPr>
         <p:spPr>
           <a:xfrm>
-            <a:off x="6537960" y="1325880"/>
-            <a:ext cx="4663440" cy="365760"/>
+            <a:off x="2578608" y="1463040"/>
+            <a:ext cx="1600200" cy="256032"/>
           </a:xfrm>
           <a:prstGeom prst="rect">
             <a:avLst/>
@@ -3798,27 +4050,28 @@
           </a:bodyPr>
           <a:lstStyle/>
           <a:p>
-            <a:r>
-              <a:rPr sz="2000" b="1">
+            <a:pPr algn="ctr"/>
+            <a:r>
+              <a:rPr sz="1600" b="1">
                 <a:solidFill>
                   <a:srgbClr val="F1F5F9"/>
                 </a:solidFill>
               </a:rPr>
-              <a:t>최근 확장 기능</a:t>
-            </a:r>
-          </a:p>
-        </p:txBody>
-      </p:sp>
-      <p:sp>
-        <p:nvSpPr>
-          <p:cNvPr id="9" name="TextBox 8"/>
+              <a:t>2. 파싱</a:t>
+            </a:r>
+          </a:p>
+        </p:txBody>
+      </p:sp>
+      <p:sp>
+        <p:nvSpPr>
+          <p:cNvPr id="11" name="TextBox 10"/>
           <p:cNvSpPr txBox="1"/>
           <p:nvPr/>
         </p:nvSpPr>
         <p:spPr>
           <a:xfrm>
-            <a:off x="6565392" y="1783080"/>
-            <a:ext cx="4572000" cy="4297680"/>
+            <a:off x="2578608" y="1755648"/>
+            <a:ext cx="1600200" cy="822960"/>
           </a:xfrm>
           <a:prstGeom prst="rect">
             <a:avLst/>
@@ -3826,7 +4079,683 @@
           <a:noFill/>
         </p:spPr>
         <p:txBody>
-          <a:bodyPr wrap="square">
+          <a:bodyPr wrap="none">
+            <a:spAutoFit/>
+          </a:bodyPr>
+          <a:lstStyle/>
+          <a:p>
+            <a:pPr algn="ctr"/>
+            <a:r>
+              <a:rPr sz="1100">
+                <a:solidFill>
+                  <a:srgbClr val="BFCDE0"/>
+                </a:solidFill>
+              </a:rPr>
+              <a:t>Marker / PyMuPDF / Qwen2.5-VL / Tesseract
+페이지 단위 라우팅</a:t>
+            </a:r>
+          </a:p>
+        </p:txBody>
+      </p:sp>
+      <p:sp>
+        <p:nvSpPr>
+          <p:cNvPr id="12" name="TextBox 11"/>
+          <p:cNvSpPr txBox="1"/>
+          <p:nvPr/>
+        </p:nvSpPr>
+        <p:spPr>
+          <a:xfrm>
+            <a:off x="4279392" y="1883664"/>
+            <a:ext cx="182880" cy="228600"/>
+          </a:xfrm>
+          <a:prstGeom prst="rect">
+            <a:avLst/>
+          </a:prstGeom>
+          <a:noFill/>
+        </p:spPr>
+        <p:txBody>
+          <a:bodyPr wrap="none">
+            <a:spAutoFit/>
+          </a:bodyPr>
+          <a:lstStyle/>
+          <a:p>
+            <a:pPr algn="ctr"/>
+            <a:r>
+              <a:rPr sz="1800" b="1">
+                <a:solidFill>
+                  <a:srgbClr val="1AA39A"/>
+                </a:solidFill>
+              </a:rPr>
+              <a:t>→</a:t>
+            </a:r>
+          </a:p>
+        </p:txBody>
+      </p:sp>
+      <p:sp>
+        <p:nvSpPr>
+          <p:cNvPr id="13" name="Rounded Rectangle 12"/>
+          <p:cNvSpPr/>
+          <p:nvPr/>
+        </p:nvSpPr>
+        <p:spPr>
+          <a:xfrm>
+            <a:off x="4434840" y="1371600"/>
+            <a:ext cx="1828800" cy="1417320"/>
+          </a:xfrm>
+          <a:prstGeom prst="roundRect">
+            <a:avLst/>
+          </a:prstGeom>
+          <a:solidFill>
+            <a:srgbClr val="152035"/>
+          </a:solidFill>
+          <a:ln>
+            <a:solidFill>
+              <a:srgbClr val="1AA39A"/>
+            </a:solidFill>
+          </a:ln>
+        </p:spPr>
+        <p:style>
+          <a:lnRef idx="1">
+            <a:schemeClr val="accent1"/>
+          </a:lnRef>
+          <a:fillRef idx="3">
+            <a:schemeClr val="accent1"/>
+          </a:fillRef>
+          <a:effectRef idx="2">
+            <a:schemeClr val="accent1"/>
+          </a:effectRef>
+          <a:fontRef idx="minor">
+            <a:schemeClr val="lt1"/>
+          </a:fontRef>
+        </p:style>
+        <p:txBody>
+          <a:bodyPr rtlCol="0" anchor="ctr"/>
+          <a:lstStyle/>
+          <a:p>
+            <a:pPr algn="ctr"/>
+          </a:p>
+        </p:txBody>
+      </p:sp>
+      <p:sp>
+        <p:nvSpPr>
+          <p:cNvPr id="14" name="TextBox 13"/>
+          <p:cNvSpPr txBox="1"/>
+          <p:nvPr/>
+        </p:nvSpPr>
+        <p:spPr>
+          <a:xfrm>
+            <a:off x="4544568" y="1463040"/>
+            <a:ext cx="1600200" cy="256032"/>
+          </a:xfrm>
+          <a:prstGeom prst="rect">
+            <a:avLst/>
+          </a:prstGeom>
+          <a:noFill/>
+        </p:spPr>
+        <p:txBody>
+          <a:bodyPr wrap="none">
+            <a:spAutoFit/>
+          </a:bodyPr>
+          <a:lstStyle/>
+          <a:p>
+            <a:pPr algn="ctr"/>
+            <a:r>
+              <a:rPr sz="1600" b="1">
+                <a:solidFill>
+                  <a:srgbClr val="F1F5F9"/>
+                </a:solidFill>
+              </a:rPr>
+              <a:t>3. 청킹/임베딩</a:t>
+            </a:r>
+          </a:p>
+        </p:txBody>
+      </p:sp>
+      <p:sp>
+        <p:nvSpPr>
+          <p:cNvPr id="15" name="TextBox 14"/>
+          <p:cNvSpPr txBox="1"/>
+          <p:nvPr/>
+        </p:nvSpPr>
+        <p:spPr>
+          <a:xfrm>
+            <a:off x="4544568" y="1755648"/>
+            <a:ext cx="1600200" cy="822960"/>
+          </a:xfrm>
+          <a:prstGeom prst="rect">
+            <a:avLst/>
+          </a:prstGeom>
+          <a:noFill/>
+        </p:spPr>
+        <p:txBody>
+          <a:bodyPr wrap="none">
+            <a:spAutoFit/>
+          </a:bodyPr>
+          <a:lstStyle/>
+          <a:p>
+            <a:pPr algn="ctr"/>
+            <a:r>
+              <a:rPr sz="1100">
+                <a:solidFill>
+                  <a:srgbClr val="BFCDE0"/>
+                </a:solidFill>
+              </a:rPr>
+              <a:t>시맨틱 청킹
+컨텍스트 헤더 강화
+BGE-M3 임베딩</a:t>
+            </a:r>
+          </a:p>
+        </p:txBody>
+      </p:sp>
+      <p:sp>
+        <p:nvSpPr>
+          <p:cNvPr id="16" name="TextBox 15"/>
+          <p:cNvSpPr txBox="1"/>
+          <p:nvPr/>
+        </p:nvSpPr>
+        <p:spPr>
+          <a:xfrm>
+            <a:off x="6245352" y="1883664"/>
+            <a:ext cx="182880" cy="228600"/>
+          </a:xfrm>
+          <a:prstGeom prst="rect">
+            <a:avLst/>
+          </a:prstGeom>
+          <a:noFill/>
+        </p:spPr>
+        <p:txBody>
+          <a:bodyPr wrap="none">
+            <a:spAutoFit/>
+          </a:bodyPr>
+          <a:lstStyle/>
+          <a:p>
+            <a:pPr algn="ctr"/>
+            <a:r>
+              <a:rPr sz="1800" b="1">
+                <a:solidFill>
+                  <a:srgbClr val="1AA39A"/>
+                </a:solidFill>
+              </a:rPr>
+              <a:t>→</a:t>
+            </a:r>
+          </a:p>
+        </p:txBody>
+      </p:sp>
+      <p:sp>
+        <p:nvSpPr>
+          <p:cNvPr id="17" name="Rounded Rectangle 16"/>
+          <p:cNvSpPr/>
+          <p:nvPr/>
+        </p:nvSpPr>
+        <p:spPr>
+          <a:xfrm>
+            <a:off x="6400799" y="1371600"/>
+            <a:ext cx="1828800" cy="1417320"/>
+          </a:xfrm>
+          <a:prstGeom prst="roundRect">
+            <a:avLst/>
+          </a:prstGeom>
+          <a:solidFill>
+            <a:srgbClr val="152035"/>
+          </a:solidFill>
+          <a:ln>
+            <a:solidFill>
+              <a:srgbClr val="F59E0B"/>
+            </a:solidFill>
+          </a:ln>
+        </p:spPr>
+        <p:style>
+          <a:lnRef idx="1">
+            <a:schemeClr val="accent1"/>
+          </a:lnRef>
+          <a:fillRef idx="3">
+            <a:schemeClr val="accent1"/>
+          </a:fillRef>
+          <a:effectRef idx="2">
+            <a:schemeClr val="accent1"/>
+          </a:effectRef>
+          <a:fontRef idx="minor">
+            <a:schemeClr val="lt1"/>
+          </a:fontRef>
+        </p:style>
+        <p:txBody>
+          <a:bodyPr rtlCol="0" anchor="ctr"/>
+          <a:lstStyle/>
+          <a:p>
+            <a:pPr algn="ctr"/>
+          </a:p>
+        </p:txBody>
+      </p:sp>
+      <p:sp>
+        <p:nvSpPr>
+          <p:cNvPr id="18" name="TextBox 17"/>
+          <p:cNvSpPr txBox="1"/>
+          <p:nvPr/>
+        </p:nvSpPr>
+        <p:spPr>
+          <a:xfrm>
+            <a:off x="6510527" y="1463040"/>
+            <a:ext cx="1600200" cy="256032"/>
+          </a:xfrm>
+          <a:prstGeom prst="rect">
+            <a:avLst/>
+          </a:prstGeom>
+          <a:noFill/>
+        </p:spPr>
+        <p:txBody>
+          <a:bodyPr wrap="none">
+            <a:spAutoFit/>
+          </a:bodyPr>
+          <a:lstStyle/>
+          <a:p>
+            <a:pPr algn="ctr"/>
+            <a:r>
+              <a:rPr sz="1600" b="1">
+                <a:solidFill>
+                  <a:srgbClr val="F1F5F9"/>
+                </a:solidFill>
+              </a:rPr>
+              <a:t>4. 저장</a:t>
+            </a:r>
+          </a:p>
+        </p:txBody>
+      </p:sp>
+      <p:sp>
+        <p:nvSpPr>
+          <p:cNvPr id="19" name="TextBox 18"/>
+          <p:cNvSpPr txBox="1"/>
+          <p:nvPr/>
+        </p:nvSpPr>
+        <p:spPr>
+          <a:xfrm>
+            <a:off x="6510527" y="1755648"/>
+            <a:ext cx="1600200" cy="822960"/>
+          </a:xfrm>
+          <a:prstGeom prst="rect">
+            <a:avLst/>
+          </a:prstGeom>
+          <a:noFill/>
+        </p:spPr>
+        <p:txBody>
+          <a:bodyPr wrap="none">
+            <a:spAutoFit/>
+          </a:bodyPr>
+          <a:lstStyle/>
+          <a:p>
+            <a:pPr algn="ctr"/>
+            <a:r>
+              <a:rPr sz="1100">
+                <a:solidFill>
+                  <a:srgbClr val="BFCDE0"/>
+                </a:solidFill>
+              </a:rPr>
+              <a:t>ChromaDB 저장
+Keyword index 구축
+문서 레지스트리 기록</a:t>
+            </a:r>
+          </a:p>
+        </p:txBody>
+      </p:sp>
+      <p:sp>
+        <p:nvSpPr>
+          <p:cNvPr id="20" name="TextBox 19"/>
+          <p:cNvSpPr txBox="1"/>
+          <p:nvPr/>
+        </p:nvSpPr>
+        <p:spPr>
+          <a:xfrm>
+            <a:off x="8211311" y="1883664"/>
+            <a:ext cx="182880" cy="228600"/>
+          </a:xfrm>
+          <a:prstGeom prst="rect">
+            <a:avLst/>
+          </a:prstGeom>
+          <a:noFill/>
+        </p:spPr>
+        <p:txBody>
+          <a:bodyPr wrap="none">
+            <a:spAutoFit/>
+          </a:bodyPr>
+          <a:lstStyle/>
+          <a:p>
+            <a:pPr algn="ctr"/>
+            <a:r>
+              <a:rPr sz="1800" b="1">
+                <a:solidFill>
+                  <a:srgbClr val="1AA39A"/>
+                </a:solidFill>
+              </a:rPr>
+              <a:t>→</a:t>
+            </a:r>
+          </a:p>
+        </p:txBody>
+      </p:sp>
+      <p:sp>
+        <p:nvSpPr>
+          <p:cNvPr id="21" name="Rounded Rectangle 20"/>
+          <p:cNvSpPr/>
+          <p:nvPr/>
+        </p:nvSpPr>
+        <p:spPr>
+          <a:xfrm>
+            <a:off x="8366760" y="1371600"/>
+            <a:ext cx="1828800" cy="1417320"/>
+          </a:xfrm>
+          <a:prstGeom prst="roundRect">
+            <a:avLst/>
+          </a:prstGeom>
+          <a:solidFill>
+            <a:srgbClr val="152035"/>
+          </a:solidFill>
+          <a:ln>
+            <a:solidFill>
+              <a:srgbClr val="1AA39A"/>
+            </a:solidFill>
+          </a:ln>
+        </p:spPr>
+        <p:style>
+          <a:lnRef idx="1">
+            <a:schemeClr val="accent1"/>
+          </a:lnRef>
+          <a:fillRef idx="3">
+            <a:schemeClr val="accent1"/>
+          </a:fillRef>
+          <a:effectRef idx="2">
+            <a:schemeClr val="accent1"/>
+          </a:effectRef>
+          <a:fontRef idx="minor">
+            <a:schemeClr val="lt1"/>
+          </a:fontRef>
+        </p:style>
+        <p:txBody>
+          <a:bodyPr rtlCol="0" anchor="ctr"/>
+          <a:lstStyle/>
+          <a:p>
+            <a:pPr algn="ctr"/>
+          </a:p>
+        </p:txBody>
+      </p:sp>
+      <p:sp>
+        <p:nvSpPr>
+          <p:cNvPr id="22" name="TextBox 21"/>
+          <p:cNvSpPr txBox="1"/>
+          <p:nvPr/>
+        </p:nvSpPr>
+        <p:spPr>
+          <a:xfrm>
+            <a:off x="8476488" y="1463040"/>
+            <a:ext cx="1600200" cy="256032"/>
+          </a:xfrm>
+          <a:prstGeom prst="rect">
+            <a:avLst/>
+          </a:prstGeom>
+          <a:noFill/>
+        </p:spPr>
+        <p:txBody>
+          <a:bodyPr wrap="none">
+            <a:spAutoFit/>
+          </a:bodyPr>
+          <a:lstStyle/>
+          <a:p>
+            <a:pPr algn="ctr"/>
+            <a:r>
+              <a:rPr sz="1600" b="1">
+                <a:solidFill>
+                  <a:srgbClr val="F1F5F9"/>
+                </a:solidFill>
+              </a:rPr>
+              <a:t>5. 검색</a:t>
+            </a:r>
+          </a:p>
+        </p:txBody>
+      </p:sp>
+      <p:sp>
+        <p:nvSpPr>
+          <p:cNvPr id="23" name="TextBox 22"/>
+          <p:cNvSpPr txBox="1"/>
+          <p:nvPr/>
+        </p:nvSpPr>
+        <p:spPr>
+          <a:xfrm>
+            <a:off x="8476488" y="1755648"/>
+            <a:ext cx="1600200" cy="822960"/>
+          </a:xfrm>
+          <a:prstGeom prst="rect">
+            <a:avLst/>
+          </a:prstGeom>
+          <a:noFill/>
+        </p:spPr>
+        <p:txBody>
+          <a:bodyPr wrap="none">
+            <a:spAutoFit/>
+          </a:bodyPr>
+          <a:lstStyle/>
+          <a:p>
+            <a:pPr algn="ctr"/>
+            <a:r>
+              <a:rPr sz="1100">
+                <a:solidFill>
+                  <a:srgbClr val="BFCDE0"/>
+                </a:solidFill>
+              </a:rPr>
+              <a:t>Vector + Keyword
+RRF 융합
+필요시 reranker</a:t>
+            </a:r>
+          </a:p>
+        </p:txBody>
+      </p:sp>
+      <p:sp>
+        <p:nvSpPr>
+          <p:cNvPr id="24" name="TextBox 23"/>
+          <p:cNvSpPr txBox="1"/>
+          <p:nvPr/>
+        </p:nvSpPr>
+        <p:spPr>
+          <a:xfrm>
+            <a:off x="10177272" y="1883664"/>
+            <a:ext cx="182880" cy="228600"/>
+          </a:xfrm>
+          <a:prstGeom prst="rect">
+            <a:avLst/>
+          </a:prstGeom>
+          <a:noFill/>
+        </p:spPr>
+        <p:txBody>
+          <a:bodyPr wrap="none">
+            <a:spAutoFit/>
+          </a:bodyPr>
+          <a:lstStyle/>
+          <a:p>
+            <a:pPr algn="ctr"/>
+            <a:r>
+              <a:rPr sz="1800" b="1">
+                <a:solidFill>
+                  <a:srgbClr val="1AA39A"/>
+                </a:solidFill>
+              </a:rPr>
+              <a:t>→</a:t>
+            </a:r>
+          </a:p>
+        </p:txBody>
+      </p:sp>
+      <p:sp>
+        <p:nvSpPr>
+          <p:cNvPr id="25" name="Rounded Rectangle 24"/>
+          <p:cNvSpPr/>
+          <p:nvPr/>
+        </p:nvSpPr>
+        <p:spPr>
+          <a:xfrm>
+            <a:off x="10332720" y="1371600"/>
+            <a:ext cx="1828800" cy="1417320"/>
+          </a:xfrm>
+          <a:prstGeom prst="roundRect">
+            <a:avLst/>
+          </a:prstGeom>
+          <a:solidFill>
+            <a:srgbClr val="152035"/>
+          </a:solidFill>
+          <a:ln>
+            <a:solidFill>
+              <a:srgbClr val="F59E0B"/>
+            </a:solidFill>
+          </a:ln>
+        </p:spPr>
+        <p:style>
+          <a:lnRef idx="1">
+            <a:schemeClr val="accent1"/>
+          </a:lnRef>
+          <a:fillRef idx="3">
+            <a:schemeClr val="accent1"/>
+          </a:fillRef>
+          <a:effectRef idx="2">
+            <a:schemeClr val="accent1"/>
+          </a:effectRef>
+          <a:fontRef idx="minor">
+            <a:schemeClr val="lt1"/>
+          </a:fontRef>
+        </p:style>
+        <p:txBody>
+          <a:bodyPr rtlCol="0" anchor="ctr"/>
+          <a:lstStyle/>
+          <a:p>
+            <a:pPr algn="ctr"/>
+          </a:p>
+        </p:txBody>
+      </p:sp>
+      <p:sp>
+        <p:nvSpPr>
+          <p:cNvPr id="26" name="TextBox 25"/>
+          <p:cNvSpPr txBox="1"/>
+          <p:nvPr/>
+        </p:nvSpPr>
+        <p:spPr>
+          <a:xfrm>
+            <a:off x="10442448" y="1463040"/>
+            <a:ext cx="1600200" cy="256032"/>
+          </a:xfrm>
+          <a:prstGeom prst="rect">
+            <a:avLst/>
+          </a:prstGeom>
+          <a:noFill/>
+        </p:spPr>
+        <p:txBody>
+          <a:bodyPr wrap="none">
+            <a:spAutoFit/>
+          </a:bodyPr>
+          <a:lstStyle/>
+          <a:p>
+            <a:pPr algn="ctr"/>
+            <a:r>
+              <a:rPr sz="1600" b="1">
+                <a:solidFill>
+                  <a:srgbClr val="F1F5F9"/>
+                </a:solidFill>
+              </a:rPr>
+              <a:t>6. 답변</a:t>
+            </a:r>
+          </a:p>
+        </p:txBody>
+      </p:sp>
+      <p:sp>
+        <p:nvSpPr>
+          <p:cNvPr id="27" name="TextBox 26"/>
+          <p:cNvSpPr txBox="1"/>
+          <p:nvPr/>
+        </p:nvSpPr>
+        <p:spPr>
+          <a:xfrm>
+            <a:off x="10442448" y="1755648"/>
+            <a:ext cx="1600200" cy="822960"/>
+          </a:xfrm>
+          <a:prstGeom prst="rect">
+            <a:avLst/>
+          </a:prstGeom>
+          <a:noFill/>
+        </p:spPr>
+        <p:txBody>
+          <a:bodyPr wrap="none">
+            <a:spAutoFit/>
+          </a:bodyPr>
+          <a:lstStyle/>
+          <a:p>
+            <a:pPr algn="ctr"/>
+            <a:r>
+              <a:rPr sz="1100">
+                <a:solidFill>
+                  <a:srgbClr val="BFCDE0"/>
+                </a:solidFill>
+              </a:rPr>
+              <a:t>문서 스코프 QA
+업로드 문서 비교
+거절/명확화 응답</a:t>
+            </a:r>
+          </a:p>
+        </p:txBody>
+      </p:sp>
+      <p:sp>
+        <p:nvSpPr>
+          <p:cNvPr id="28" name="Rounded Rectangle 27"/>
+          <p:cNvSpPr/>
+          <p:nvPr/>
+        </p:nvSpPr>
+        <p:spPr>
+          <a:xfrm>
+            <a:off x="914400" y="3749039"/>
+            <a:ext cx="10241280" cy="1554480"/>
+          </a:xfrm>
+          <a:prstGeom prst="roundRect">
+            <a:avLst/>
+          </a:prstGeom>
+          <a:solidFill>
+            <a:srgbClr val="101C2E"/>
+          </a:solidFill>
+          <a:ln>
+            <a:solidFill>
+              <a:srgbClr val="1AA39A"/>
+            </a:solidFill>
+          </a:ln>
+        </p:spPr>
+        <p:style>
+          <a:lnRef idx="1">
+            <a:schemeClr val="accent1"/>
+          </a:lnRef>
+          <a:fillRef idx="3">
+            <a:schemeClr val="accent1"/>
+          </a:fillRef>
+          <a:effectRef idx="2">
+            <a:schemeClr val="accent1"/>
+          </a:effectRef>
+          <a:fontRef idx="minor">
+            <a:schemeClr val="lt1"/>
+          </a:fontRef>
+        </p:style>
+        <p:txBody>
+          <a:bodyPr rtlCol="0" anchor="ctr"/>
+          <a:lstStyle/>
+          <a:p>
+            <a:pPr algn="ctr"/>
+          </a:p>
+        </p:txBody>
+      </p:sp>
+      <p:sp>
+        <p:nvSpPr>
+          <p:cNvPr id="29" name="TextBox 28"/>
+          <p:cNvSpPr txBox="1"/>
+          <p:nvPr/>
+        </p:nvSpPr>
+        <p:spPr>
+          <a:xfrm>
+            <a:off x="1143000" y="3977639"/>
+            <a:ext cx="9784080" cy="1097280"/>
+          </a:xfrm>
+          <a:prstGeom prst="rect">
+            <a:avLst/>
+          </a:prstGeom>
+          <a:noFill/>
+        </p:spPr>
+        <p:txBody>
+          <a:bodyPr wrap="none">
             <a:spAutoFit/>
           </a:bodyPr>
           <a:lstStyle/>
@@ -3837,12 +4766,12 @@
               </a:spcAft>
               <a:defRPr sz="1800">
                 <a:solidFill>
-                  <a:srgbClr val="BFCDE0"/>
+                  <a:srgbClr val="F1F5F9"/>
                 </a:solidFill>
               </a:defRPr>
             </a:pPr>
             <a:r>
-              <a:t>다중 업로드 및 선택 기반 비교형 질문 지원</a:t>
+              <a:t>현재 강점: 입력부터 검색까지의 RAG 파이프라인은 안정화 단계</a:t>
             </a:r>
           </a:p>
           <a:p>
@@ -3857,37 +4786,7 @@
               </a:defRPr>
             </a:pPr>
             <a:r>
-              <a:t>비교형 벤치마크 파일 추가</a:t>
-            </a:r>
-          </a:p>
-          <a:p>
-            <a:pPr>
-              <a:spcAft>
-                <a:spcPts val="800"/>
-              </a:spcAft>
-              <a:defRPr sz="1800">
-                <a:solidFill>
-                  <a:srgbClr val="BFCDE0"/>
-                </a:solidFill>
-              </a:defRPr>
-            </a:pPr>
-            <a:r>
-              <a:t>QLoRA 학습용 초기 데이터셋 확장</a:t>
-            </a:r>
-          </a:p>
-          <a:p>
-            <a:pPr>
-              <a:spcAft>
-                <a:spcPts val="800"/>
-              </a:spcAft>
-              <a:defRPr sz="1800">
-                <a:solidFill>
-                  <a:srgbClr val="BFCDE0"/>
-                </a:solidFill>
-              </a:defRPr>
-            </a:pPr>
-            <a:r>
-              <a:t>실시간 지연시간을 고려한 하이브리드 검색 정책</a:t>
+              <a:t>현재 보완점: 비교형 질문 품질, 실시간 지연시간, 한글 중심 QLoRA 학습 데이터 확대</a:t>
             </a:r>
           </a:p>
         </p:txBody>
@@ -3989,55 +4888,21 @@
                   <a:srgbClr val="F1F5F9"/>
                 </a:solidFill>
               </a:rPr>
-              <a:t>평가 및 수치 현황</a:t>
-            </a:r>
-          </a:p>
-        </p:txBody>
-      </p:sp>
-      <p:sp>
-        <p:nvSpPr>
-          <p:cNvPr id="4" name="TextBox 3"/>
-          <p:cNvSpPr txBox="1"/>
-          <p:nvPr/>
-        </p:nvSpPr>
-        <p:spPr>
-          <a:xfrm>
-            <a:off x="8366760" y="182880"/>
-            <a:ext cx="3291840" cy="228600"/>
-          </a:xfrm>
-          <a:prstGeom prst="rect">
-            <a:avLst/>
-          </a:prstGeom>
-          <a:noFill/>
-        </p:spPr>
-        <p:txBody>
-          <a:bodyPr wrap="none">
-            <a:spAutoFit/>
-          </a:bodyPr>
-          <a:lstStyle/>
-          <a:p>
-            <a:pPr algn="r"/>
-            <a:r>
-              <a:rPr sz="1100">
-                <a:solidFill>
-                  <a:srgbClr val="BFCDE0"/>
-                </a:solidFill>
-              </a:rPr>
-              <a:t>2026-03-23 기준</a:t>
-            </a:r>
-          </a:p>
-        </p:txBody>
-      </p:sp>
-      <p:sp>
-        <p:nvSpPr>
-          <p:cNvPr id="5" name="Rounded Rectangle 4"/>
+              <a:t>현재까지 구현된 핵심 기능</a:t>
+            </a:r>
+          </a:p>
+        </p:txBody>
+      </p:sp>
+      <p:sp>
+        <p:nvSpPr>
+          <p:cNvPr id="4" name="Rounded Rectangle 3"/>
           <p:cNvSpPr/>
           <p:nvPr/>
         </p:nvSpPr>
         <p:spPr>
           <a:xfrm>
-            <a:off x="731520" y="1280160"/>
-            <a:ext cx="5074920" cy="1234440"/>
+            <a:off x="594360" y="1143000"/>
+            <a:ext cx="5212080" cy="5303520"/>
           </a:xfrm>
           <a:prstGeom prst="roundRect">
             <a:avLst/>
@@ -4075,14 +4940,14 @@
       </p:sp>
       <p:sp>
         <p:nvSpPr>
-          <p:cNvPr id="6" name="TextBox 5"/>
+          <p:cNvPr id="5" name="TextBox 4"/>
           <p:cNvSpPr txBox="1"/>
           <p:nvPr/>
         </p:nvSpPr>
         <p:spPr>
           <a:xfrm>
-            <a:off x="896112" y="1389888"/>
-            <a:ext cx="4663440" cy="256032"/>
+            <a:off x="822960" y="1325880"/>
+            <a:ext cx="4663440" cy="365760"/>
           </a:xfrm>
           <a:prstGeom prst="rect">
             <a:avLst/>
@@ -4096,26 +4961,26 @@
           <a:lstStyle/>
           <a:p>
             <a:r>
-              <a:rPr sz="1400">
-                <a:solidFill>
-                  <a:srgbClr val="7890AD"/>
+              <a:rPr sz="2000" b="1">
+                <a:solidFill>
+                  <a:srgbClr val="F1F5F9"/>
                 </a:solidFill>
               </a:rPr>
-              <a:t>라이브러리 벤치마크</a:t>
-            </a:r>
-          </a:p>
-        </p:txBody>
-      </p:sp>
-      <p:sp>
-        <p:nvSpPr>
-          <p:cNvPr id="7" name="TextBox 6"/>
+              <a:t>완료된 기능</a:t>
+            </a:r>
+          </a:p>
+        </p:txBody>
+      </p:sp>
+      <p:sp>
+        <p:nvSpPr>
+          <p:cNvPr id="6" name="TextBox 5"/>
           <p:cNvSpPr txBox="1"/>
           <p:nvPr/>
         </p:nvSpPr>
         <p:spPr>
           <a:xfrm>
-            <a:off x="896112" y="1664208"/>
-            <a:ext cx="4663440" cy="329184"/>
+            <a:off x="850392" y="1783080"/>
+            <a:ext cx="4572000" cy="4297680"/>
           </a:xfrm>
           <a:prstGeom prst="rect">
             <a:avLst/>
@@ -4123,65 +4988,82 @@
           <a:noFill/>
         </p:spPr>
         <p:txBody>
-          <a:bodyPr wrap="none">
+          <a:bodyPr wrap="square">
             <a:spAutoFit/>
           </a:bodyPr>
           <a:lstStyle/>
           <a:p>
-            <a:r>
-              <a:rPr sz="2200" b="1">
-                <a:solidFill>
-                  <a:srgbClr val="F1F5F9"/>
-                </a:solidFill>
-              </a:rPr>
-              <a:t>안정화</a:t>
-            </a:r>
-          </a:p>
-        </p:txBody>
-      </p:sp>
-      <p:sp>
-        <p:nvSpPr>
-          <p:cNvPr id="8" name="TextBox 7"/>
-          <p:cNvSpPr txBox="1"/>
-          <p:nvPr/>
-        </p:nvSpPr>
-        <p:spPr>
-          <a:xfrm>
-            <a:off x="896112" y="2066544"/>
-            <a:ext cx="4663440" cy="256032"/>
-          </a:xfrm>
-          <a:prstGeom prst="rect">
-            <a:avLst/>
-          </a:prstGeom>
-          <a:noFill/>
-        </p:spPr>
-        <p:txBody>
-          <a:bodyPr wrap="none">
-            <a:spAutoFit/>
-          </a:bodyPr>
-          <a:lstStyle/>
-          <a:p>
-            <a:r>
-              <a:rPr sz="1100">
+            <a:pPr>
+              <a:spcAft>
+                <a:spcPts val="800"/>
+              </a:spcAft>
+              <a:defRPr sz="1800">
                 <a:solidFill>
                   <a:srgbClr val="BFCDE0"/>
                 </a:solidFill>
-              </a:rPr>
-              <a:t>기존 문서 QA 기준선 확보</a:t>
-            </a:r>
-          </a:p>
-        </p:txBody>
-      </p:sp>
-      <p:sp>
-        <p:nvSpPr>
-          <p:cNvPr id="9" name="Rounded Rectangle 8"/>
+              </a:defRPr>
+            </a:pPr>
+            <a:r>
+              <a:t>텍스트 PDF / 스캔 PDF / 이미지 업로드 처리</a:t>
+            </a:r>
+          </a:p>
+          <a:p>
+            <a:pPr>
+              <a:spcAft>
+                <a:spcPts val="800"/>
+              </a:spcAft>
+              <a:defRPr sz="1800">
+                <a:solidFill>
+                  <a:srgbClr val="BFCDE0"/>
+                </a:solidFill>
+              </a:defRPr>
+            </a:pPr>
+            <a:r>
+              <a:t>업로드 문서 기억 및 사이드바 재선택</a:t>
+            </a:r>
+          </a:p>
+          <a:p>
+            <a:pPr>
+              <a:spcAft>
+                <a:spcPts val="800"/>
+              </a:spcAft>
+              <a:defRPr sz="1800">
+                <a:solidFill>
+                  <a:srgbClr val="BFCDE0"/>
+                </a:solidFill>
+              </a:defRPr>
+            </a:pPr>
+            <a:r>
+              <a:t>동일 파일 재업로드 시 중복 청크 정리</a:t>
+            </a:r>
+          </a:p>
+          <a:p>
+            <a:pPr>
+              <a:spcAft>
+                <a:spcPts val="800"/>
+              </a:spcAft>
+              <a:defRPr sz="1800">
+                <a:solidFill>
+                  <a:srgbClr val="BFCDE0"/>
+                </a:solidFill>
+              </a:defRPr>
+            </a:pPr>
+            <a:r>
+              <a:t>번들 PDF 모호성 감지 및 서브지침 범위 축소</a:t>
+            </a:r>
+          </a:p>
+        </p:txBody>
+      </p:sp>
+      <p:sp>
+        <p:nvSpPr>
+          <p:cNvPr id="7" name="Rounded Rectangle 6"/>
           <p:cNvSpPr/>
           <p:nvPr/>
         </p:nvSpPr>
         <p:spPr>
           <a:xfrm>
-            <a:off x="6309360" y="1280160"/>
-            <a:ext cx="5074920" cy="1234440"/>
+            <a:off x="6309360" y="1143000"/>
+            <a:ext cx="5212080" cy="5303520"/>
           </a:xfrm>
           <a:prstGeom prst="roundRect">
             <a:avLst/>
@@ -4219,14 +5101,14 @@
       </p:sp>
       <p:sp>
         <p:nvSpPr>
-          <p:cNvPr id="10" name="TextBox 9"/>
+          <p:cNvPr id="8" name="TextBox 7"/>
           <p:cNvSpPr txBox="1"/>
           <p:nvPr/>
         </p:nvSpPr>
         <p:spPr>
           <a:xfrm>
-            <a:off x="6473952" y="1389888"/>
-            <a:ext cx="4663440" cy="256032"/>
+            <a:off x="6537960" y="1325880"/>
+            <a:ext cx="4663440" cy="365760"/>
           </a:xfrm>
           <a:prstGeom prst="rect">
             <a:avLst/>
@@ -4240,26 +5122,26 @@
           <a:lstStyle/>
           <a:p>
             <a:r>
-              <a:rPr sz="1400">
-                <a:solidFill>
-                  <a:srgbClr val="7890AD"/>
+              <a:rPr sz="2000" b="1">
+                <a:solidFill>
+                  <a:srgbClr val="F1F5F9"/>
                 </a:solidFill>
               </a:rPr>
-              <a:t>업로드 벤치마크</a:t>
-            </a:r>
-          </a:p>
-        </p:txBody>
-      </p:sp>
-      <p:sp>
-        <p:nvSpPr>
-          <p:cNvPr id="11" name="TextBox 10"/>
+              <a:t>최근 확장 기능</a:t>
+            </a:r>
+          </a:p>
+        </p:txBody>
+      </p:sp>
+      <p:sp>
+        <p:nvSpPr>
+          <p:cNvPr id="9" name="TextBox 8"/>
           <p:cNvSpPr txBox="1"/>
           <p:nvPr/>
         </p:nvSpPr>
         <p:spPr>
           <a:xfrm>
-            <a:off x="6473952" y="1664208"/>
-            <a:ext cx="4663440" cy="329184"/>
+            <a:off x="6565392" y="1783080"/>
+            <a:ext cx="4572000" cy="4297680"/>
           </a:xfrm>
           <a:prstGeom prst="rect">
             <a:avLst/>
@@ -4267,627 +5149,68 @@
           <a:noFill/>
         </p:spPr>
         <p:txBody>
-          <a:bodyPr wrap="none">
+          <a:bodyPr wrap="square">
             <a:spAutoFit/>
           </a:bodyPr>
           <a:lstStyle/>
           <a:p>
-            <a:r>
-              <a:rPr sz="2200" b="1">
-                <a:solidFill>
-                  <a:srgbClr val="F1F5F9"/>
-                </a:solidFill>
-              </a:rPr>
-              <a:t>8 rows / 소스 재현성 1.0</a:t>
-            </a:r>
-          </a:p>
-        </p:txBody>
-      </p:sp>
-      <p:sp>
-        <p:nvSpPr>
-          <p:cNvPr id="12" name="TextBox 11"/>
-          <p:cNvSpPr txBox="1"/>
-          <p:nvPr/>
-        </p:nvSpPr>
-        <p:spPr>
-          <a:xfrm>
-            <a:off x="6473952" y="2066544"/>
-            <a:ext cx="4663440" cy="256032"/>
-          </a:xfrm>
-          <a:prstGeom prst="rect">
-            <a:avLst/>
-          </a:prstGeom>
-          <a:noFill/>
-        </p:spPr>
-        <p:txBody>
-          <a:bodyPr wrap="none">
-            <a:spAutoFit/>
-          </a:bodyPr>
-          <a:lstStyle/>
-          <a:p>
-            <a:r>
-              <a:rPr sz="1100">
+            <a:pPr>
+              <a:spcAft>
+                <a:spcPts val="800"/>
+              </a:spcAft>
+              <a:defRPr sz="1800">
                 <a:solidFill>
                   <a:srgbClr val="BFCDE0"/>
                 </a:solidFill>
-              </a:rPr>
-              <a:t>번들 PDF 모호성/거절 케이스 포함</a:t>
-            </a:r>
-          </a:p>
-        </p:txBody>
-      </p:sp>
-      <p:sp>
-        <p:nvSpPr>
-          <p:cNvPr id="13" name="Rounded Rectangle 12"/>
-          <p:cNvSpPr/>
-          <p:nvPr/>
-        </p:nvSpPr>
-        <p:spPr>
-          <a:xfrm>
-            <a:off x="731520" y="2880360"/>
-            <a:ext cx="5074920" cy="1234440"/>
-          </a:xfrm>
-          <a:prstGeom prst="roundRect">
-            <a:avLst/>
-          </a:prstGeom>
-          <a:solidFill>
-            <a:srgbClr val="152035"/>
-          </a:solidFill>
-          <a:ln>
-            <a:solidFill>
-              <a:srgbClr val="1AA39A"/>
-            </a:solidFill>
-          </a:ln>
-        </p:spPr>
-        <p:style>
-          <a:lnRef idx="1">
-            <a:schemeClr val="accent1"/>
-          </a:lnRef>
-          <a:fillRef idx="3">
-            <a:schemeClr val="accent1"/>
-          </a:fillRef>
-          <a:effectRef idx="2">
-            <a:schemeClr val="accent1"/>
-          </a:effectRef>
-          <a:fontRef idx="minor">
-            <a:schemeClr val="lt1"/>
-          </a:fontRef>
-        </p:style>
-        <p:txBody>
-          <a:bodyPr rtlCol="0" anchor="ctr"/>
-          <a:lstStyle/>
-          <a:p>
-            <a:pPr algn="ctr"/>
-          </a:p>
-        </p:txBody>
-      </p:sp>
-      <p:sp>
-        <p:nvSpPr>
-          <p:cNvPr id="14" name="TextBox 13"/>
-          <p:cNvSpPr txBox="1"/>
-          <p:nvPr/>
-        </p:nvSpPr>
-        <p:spPr>
-          <a:xfrm>
-            <a:off x="896112" y="2990088"/>
-            <a:ext cx="4663440" cy="256032"/>
-          </a:xfrm>
-          <a:prstGeom prst="rect">
-            <a:avLst/>
-          </a:prstGeom>
-          <a:noFill/>
-        </p:spPr>
-        <p:txBody>
-          <a:bodyPr wrap="none">
-            <a:spAutoFit/>
-          </a:bodyPr>
-          <a:lstStyle/>
-          <a:p>
-            <a:r>
-              <a:rPr sz="1400">
-                <a:solidFill>
-                  <a:srgbClr val="7890AD"/>
-                </a:solidFill>
-              </a:rPr>
-              <a:t>업로드 평균 답변 recall</a:t>
-            </a:r>
-          </a:p>
-        </p:txBody>
-      </p:sp>
-      <p:sp>
-        <p:nvSpPr>
-          <p:cNvPr id="15" name="TextBox 14"/>
-          <p:cNvSpPr txBox="1"/>
-          <p:nvPr/>
-        </p:nvSpPr>
-        <p:spPr>
-          <a:xfrm>
-            <a:off x="896112" y="3264408"/>
-            <a:ext cx="4663440" cy="329184"/>
-          </a:xfrm>
-          <a:prstGeom prst="rect">
-            <a:avLst/>
-          </a:prstGeom>
-          <a:noFill/>
-        </p:spPr>
-        <p:txBody>
-          <a:bodyPr wrap="none">
-            <a:spAutoFit/>
-          </a:bodyPr>
-          <a:lstStyle/>
-          <a:p>
-            <a:r>
-              <a:rPr sz="2200" b="1">
-                <a:solidFill>
-                  <a:srgbClr val="F1F5F9"/>
-                </a:solidFill>
-              </a:rPr>
-              <a:t>0.896</a:t>
-            </a:r>
-          </a:p>
-        </p:txBody>
-      </p:sp>
-      <p:sp>
-        <p:nvSpPr>
-          <p:cNvPr id="16" name="TextBox 15"/>
-          <p:cNvSpPr txBox="1"/>
-          <p:nvPr/>
-        </p:nvSpPr>
-        <p:spPr>
-          <a:xfrm>
-            <a:off x="896112" y="3666744"/>
-            <a:ext cx="4663440" cy="256032"/>
-          </a:xfrm>
-          <a:prstGeom prst="rect">
-            <a:avLst/>
-          </a:prstGeom>
-          <a:noFill/>
-        </p:spPr>
-        <p:txBody>
-          <a:bodyPr wrap="none">
-            <a:spAutoFit/>
-          </a:bodyPr>
-          <a:lstStyle/>
-          <a:p>
-            <a:r>
-              <a:rPr sz="1100">
+              </a:defRPr>
+            </a:pPr>
+            <a:r>
+              <a:t>다중 업로드 및 선택 기반 비교형 질문 지원</a:t>
+            </a:r>
+          </a:p>
+          <a:p>
+            <a:pPr>
+              <a:spcAft>
+                <a:spcPts val="800"/>
+              </a:spcAft>
+              <a:defRPr sz="1800">
                 <a:solidFill>
                   <a:srgbClr val="BFCDE0"/>
                 </a:solidFill>
-              </a:rPr>
-              <a:t>핵심 포인트 회수율 양호</a:t>
-            </a:r>
-          </a:p>
-        </p:txBody>
-      </p:sp>
-      <p:sp>
-        <p:nvSpPr>
-          <p:cNvPr id="17" name="Rounded Rectangle 16"/>
-          <p:cNvSpPr/>
-          <p:nvPr/>
-        </p:nvSpPr>
-        <p:spPr>
-          <a:xfrm>
-            <a:off x="6309360" y="2880360"/>
-            <a:ext cx="5074920" cy="1234440"/>
-          </a:xfrm>
-          <a:prstGeom prst="roundRect">
-            <a:avLst/>
-          </a:prstGeom>
-          <a:solidFill>
-            <a:srgbClr val="152035"/>
-          </a:solidFill>
-          <a:ln>
-            <a:solidFill>
-              <a:srgbClr val="F59E0B"/>
-            </a:solidFill>
-          </a:ln>
-        </p:spPr>
-        <p:style>
-          <a:lnRef idx="1">
-            <a:schemeClr val="accent1"/>
-          </a:lnRef>
-          <a:fillRef idx="3">
-            <a:schemeClr val="accent1"/>
-          </a:fillRef>
-          <a:effectRef idx="2">
-            <a:schemeClr val="accent1"/>
-          </a:effectRef>
-          <a:fontRef idx="minor">
-            <a:schemeClr val="lt1"/>
-          </a:fontRef>
-        </p:style>
-        <p:txBody>
-          <a:bodyPr rtlCol="0" anchor="ctr"/>
-          <a:lstStyle/>
-          <a:p>
-            <a:pPr algn="ctr"/>
-          </a:p>
-        </p:txBody>
-      </p:sp>
-      <p:sp>
-        <p:nvSpPr>
-          <p:cNvPr id="18" name="TextBox 17"/>
-          <p:cNvSpPr txBox="1"/>
-          <p:nvPr/>
-        </p:nvSpPr>
-        <p:spPr>
-          <a:xfrm>
-            <a:off x="6473952" y="2990088"/>
-            <a:ext cx="4663440" cy="256032"/>
-          </a:xfrm>
-          <a:prstGeom prst="rect">
-            <a:avLst/>
-          </a:prstGeom>
-          <a:noFill/>
-        </p:spPr>
-        <p:txBody>
-          <a:bodyPr wrap="none">
-            <a:spAutoFit/>
-          </a:bodyPr>
-          <a:lstStyle/>
-          <a:p>
-            <a:r>
-              <a:rPr sz="1400">
-                <a:solidFill>
-                  <a:srgbClr val="7890AD"/>
-                </a:solidFill>
-              </a:rPr>
-              <a:t>검색 지연시간</a:t>
-            </a:r>
-          </a:p>
-        </p:txBody>
-      </p:sp>
-      <p:sp>
-        <p:nvSpPr>
-          <p:cNvPr id="19" name="TextBox 18"/>
-          <p:cNvSpPr txBox="1"/>
-          <p:nvPr/>
-        </p:nvSpPr>
-        <p:spPr>
-          <a:xfrm>
-            <a:off x="6473952" y="3264408"/>
-            <a:ext cx="4663440" cy="329184"/>
-          </a:xfrm>
-          <a:prstGeom prst="rect">
-            <a:avLst/>
-          </a:prstGeom>
-          <a:noFill/>
-        </p:spPr>
-        <p:txBody>
-          <a:bodyPr wrap="none">
-            <a:spAutoFit/>
-          </a:bodyPr>
-          <a:lstStyle/>
-          <a:p>
-            <a:r>
-              <a:rPr sz="2200" b="1">
-                <a:solidFill>
-                  <a:srgbClr val="F1F5F9"/>
-                </a:solidFill>
-              </a:rPr>
-              <a:t>Hybrid 8.9ms</a:t>
-            </a:r>
-          </a:p>
-        </p:txBody>
-      </p:sp>
-      <p:sp>
-        <p:nvSpPr>
-          <p:cNvPr id="20" name="TextBox 19"/>
-          <p:cNvSpPr txBox="1"/>
-          <p:nvPr/>
-        </p:nvSpPr>
-        <p:spPr>
-          <a:xfrm>
-            <a:off x="6473952" y="3666744"/>
-            <a:ext cx="4663440" cy="256032"/>
-          </a:xfrm>
-          <a:prstGeom prst="rect">
-            <a:avLst/>
-          </a:prstGeom>
-          <a:noFill/>
-        </p:spPr>
-        <p:txBody>
-          <a:bodyPr wrap="none">
-            <a:spAutoFit/>
-          </a:bodyPr>
-          <a:lstStyle/>
-          <a:p>
-            <a:r>
-              <a:rPr sz="1100">
+              </a:defRPr>
+            </a:pPr>
+            <a:r>
+              <a:t>비교형 벤치마크 파일 추가</a:t>
+            </a:r>
+          </a:p>
+          <a:p>
+            <a:pPr>
+              <a:spcAft>
+                <a:spcPts val="800"/>
+              </a:spcAft>
+              <a:defRPr sz="1800">
                 <a:solidFill>
                   <a:srgbClr val="BFCDE0"/>
                 </a:solidFill>
-              </a:rPr>
-              <a:t>업로드 기준</a:t>
-            </a:r>
-          </a:p>
-        </p:txBody>
-      </p:sp>
-      <p:sp>
-        <p:nvSpPr>
-          <p:cNvPr id="21" name="Rounded Rectangle 20"/>
-          <p:cNvSpPr/>
-          <p:nvPr/>
-        </p:nvSpPr>
-        <p:spPr>
-          <a:xfrm>
-            <a:off x="731520" y="4480560"/>
-            <a:ext cx="5074920" cy="1234440"/>
-          </a:xfrm>
-          <a:prstGeom prst="roundRect">
-            <a:avLst/>
-          </a:prstGeom>
-          <a:solidFill>
-            <a:srgbClr val="152035"/>
-          </a:solidFill>
-          <a:ln>
-            <a:solidFill>
-              <a:srgbClr val="1AA39A"/>
-            </a:solidFill>
-          </a:ln>
-        </p:spPr>
-        <p:style>
-          <a:lnRef idx="1">
-            <a:schemeClr val="accent1"/>
-          </a:lnRef>
-          <a:fillRef idx="3">
-            <a:schemeClr val="accent1"/>
-          </a:fillRef>
-          <a:effectRef idx="2">
-            <a:schemeClr val="accent1"/>
-          </a:effectRef>
-          <a:fontRef idx="minor">
-            <a:schemeClr val="lt1"/>
-          </a:fontRef>
-        </p:style>
-        <p:txBody>
-          <a:bodyPr rtlCol="0" anchor="ctr"/>
-          <a:lstStyle/>
-          <a:p>
-            <a:pPr algn="ctr"/>
-          </a:p>
-        </p:txBody>
-      </p:sp>
-      <p:sp>
-        <p:nvSpPr>
-          <p:cNvPr id="22" name="TextBox 21"/>
-          <p:cNvSpPr txBox="1"/>
-          <p:nvPr/>
-        </p:nvSpPr>
-        <p:spPr>
-          <a:xfrm>
-            <a:off x="896112" y="4590288"/>
-            <a:ext cx="4663440" cy="256032"/>
-          </a:xfrm>
-          <a:prstGeom prst="rect">
-            <a:avLst/>
-          </a:prstGeom>
-          <a:noFill/>
-        </p:spPr>
-        <p:txBody>
-          <a:bodyPr wrap="none">
-            <a:spAutoFit/>
-          </a:bodyPr>
-          <a:lstStyle/>
-          <a:p>
-            <a:r>
-              <a:rPr sz="1400">
-                <a:solidFill>
-                  <a:srgbClr val="7890AD"/>
-                </a:solidFill>
-              </a:rPr>
-              <a:t>재정렬 지연시간</a:t>
-            </a:r>
-          </a:p>
-        </p:txBody>
-      </p:sp>
-      <p:sp>
-        <p:nvSpPr>
-          <p:cNvPr id="23" name="TextBox 22"/>
-          <p:cNvSpPr txBox="1"/>
-          <p:nvPr/>
-        </p:nvSpPr>
-        <p:spPr>
-          <a:xfrm>
-            <a:off x="896112" y="4864608"/>
-            <a:ext cx="4663440" cy="329184"/>
-          </a:xfrm>
-          <a:prstGeom prst="rect">
-            <a:avLst/>
-          </a:prstGeom>
-          <a:noFill/>
-        </p:spPr>
-        <p:txBody>
-          <a:bodyPr wrap="none">
-            <a:spAutoFit/>
-          </a:bodyPr>
-          <a:lstStyle/>
-          <a:p>
-            <a:r>
-              <a:rPr sz="2200" b="1">
-                <a:solidFill>
-                  <a:srgbClr val="F1F5F9"/>
-                </a:solidFill>
-              </a:rPr>
-              <a:t>Hybrid+Rerank 6692ms</a:t>
-            </a:r>
-          </a:p>
-        </p:txBody>
-      </p:sp>
-      <p:sp>
-        <p:nvSpPr>
-          <p:cNvPr id="24" name="TextBox 23"/>
-          <p:cNvSpPr txBox="1"/>
-          <p:nvPr/>
-        </p:nvSpPr>
-        <p:spPr>
-          <a:xfrm>
-            <a:off x="896112" y="5266944"/>
-            <a:ext cx="4663440" cy="256032"/>
-          </a:xfrm>
-          <a:prstGeom prst="rect">
-            <a:avLst/>
-          </a:prstGeom>
-          <a:noFill/>
-        </p:spPr>
-        <p:txBody>
-          <a:bodyPr wrap="none">
-            <a:spAutoFit/>
-          </a:bodyPr>
-          <a:lstStyle/>
-          <a:p>
-            <a:r>
-              <a:rPr sz="1100">
+              </a:defRPr>
+            </a:pPr>
+            <a:r>
+              <a:t>QLoRA 학습용 초기 데이터셋 확장</a:t>
+            </a:r>
+          </a:p>
+          <a:p>
+            <a:pPr>
+              <a:spcAft>
+                <a:spcPts val="800"/>
+              </a:spcAft>
+              <a:defRPr sz="1800">
                 <a:solidFill>
                   <a:srgbClr val="BFCDE0"/>
                 </a:solidFill>
-              </a:rPr>
-              <a:t>정확도 향상 있으나 실시간 채팅에는 과도</a:t>
-            </a:r>
-          </a:p>
-        </p:txBody>
-      </p:sp>
-      <p:sp>
-        <p:nvSpPr>
-          <p:cNvPr id="25" name="Rounded Rectangle 24"/>
-          <p:cNvSpPr/>
-          <p:nvPr/>
-        </p:nvSpPr>
-        <p:spPr>
-          <a:xfrm>
-            <a:off x="6309360" y="4480560"/>
-            <a:ext cx="5074920" cy="1234440"/>
-          </a:xfrm>
-          <a:prstGeom prst="roundRect">
-            <a:avLst/>
-          </a:prstGeom>
-          <a:solidFill>
-            <a:srgbClr val="152035"/>
-          </a:solidFill>
-          <a:ln>
-            <a:solidFill>
-              <a:srgbClr val="F59E0B"/>
-            </a:solidFill>
-          </a:ln>
-        </p:spPr>
-        <p:style>
-          <a:lnRef idx="1">
-            <a:schemeClr val="accent1"/>
-          </a:lnRef>
-          <a:fillRef idx="3">
-            <a:schemeClr val="accent1"/>
-          </a:fillRef>
-          <a:effectRef idx="2">
-            <a:schemeClr val="accent1"/>
-          </a:effectRef>
-          <a:fontRef idx="minor">
-            <a:schemeClr val="lt1"/>
-          </a:fontRef>
-        </p:style>
-        <p:txBody>
-          <a:bodyPr rtlCol="0" anchor="ctr"/>
-          <a:lstStyle/>
-          <a:p>
-            <a:pPr algn="ctr"/>
-          </a:p>
-        </p:txBody>
-      </p:sp>
-      <p:sp>
-        <p:nvSpPr>
-          <p:cNvPr id="26" name="TextBox 25"/>
-          <p:cNvSpPr txBox="1"/>
-          <p:nvPr/>
-        </p:nvSpPr>
-        <p:spPr>
-          <a:xfrm>
-            <a:off x="6473952" y="4590288"/>
-            <a:ext cx="4663440" cy="256032"/>
-          </a:xfrm>
-          <a:prstGeom prst="rect">
-            <a:avLst/>
-          </a:prstGeom>
-          <a:noFill/>
-        </p:spPr>
-        <p:txBody>
-          <a:bodyPr wrap="none">
-            <a:spAutoFit/>
-          </a:bodyPr>
-          <a:lstStyle/>
-          <a:p>
-            <a:r>
-              <a:rPr sz="1400">
-                <a:solidFill>
-                  <a:srgbClr val="7890AD"/>
-                </a:solidFill>
-              </a:rPr>
-              <a:t>QLoRA 학습 데이터</a:t>
-            </a:r>
-          </a:p>
-        </p:txBody>
-      </p:sp>
-      <p:sp>
-        <p:nvSpPr>
-          <p:cNvPr id="27" name="TextBox 26"/>
-          <p:cNvSpPr txBox="1"/>
-          <p:nvPr/>
-        </p:nvSpPr>
-        <p:spPr>
-          <a:xfrm>
-            <a:off x="6473952" y="4864608"/>
-            <a:ext cx="4663440" cy="329184"/>
-          </a:xfrm>
-          <a:prstGeom prst="rect">
-            <a:avLst/>
-          </a:prstGeom>
-          <a:noFill/>
-        </p:spPr>
-        <p:txBody>
-          <a:bodyPr wrap="none">
-            <a:spAutoFit/>
-          </a:bodyPr>
-          <a:lstStyle/>
-          <a:p>
-            <a:r>
-              <a:rPr sz="2200" b="1">
-                <a:solidFill>
-                  <a:srgbClr val="F1F5F9"/>
-                </a:solidFill>
-              </a:rPr>
-              <a:t>25 rows</a:t>
-            </a:r>
-          </a:p>
-        </p:txBody>
-      </p:sp>
-      <p:sp>
-        <p:nvSpPr>
-          <p:cNvPr id="28" name="TextBox 27"/>
-          <p:cNvSpPr txBox="1"/>
-          <p:nvPr/>
-        </p:nvSpPr>
-        <p:spPr>
-          <a:xfrm>
-            <a:off x="6473952" y="5266944"/>
-            <a:ext cx="4663440" cy="256032"/>
-          </a:xfrm>
-          <a:prstGeom prst="rect">
-            <a:avLst/>
-          </a:prstGeom>
-          <a:noFill/>
-        </p:spPr>
-        <p:txBody>
-          <a:bodyPr wrap="none">
-            <a:spAutoFit/>
-          </a:bodyPr>
-          <a:lstStyle/>
-          <a:p>
-            <a:r>
-              <a:rPr sz="1100">
-                <a:solidFill>
-                  <a:srgbClr val="BFCDE0"/>
-                </a:solidFill>
-              </a:rPr>
-              <a:t>한글 20 / 영어 5</a:t>
+              </a:defRPr>
+            </a:pPr>
+            <a:r>
+              <a:t>실시간 지연시간을 고려한 하이브리드 검색 정책</a:t>
             </a:r>
           </a:p>
         </p:txBody>
@@ -4989,21 +5312,55 @@
                   <a:srgbClr val="F1F5F9"/>
                 </a:solidFill>
               </a:rPr>
-              <a:t>현재 단계와 병목</a:t>
-            </a:r>
-          </a:p>
-        </p:txBody>
-      </p:sp>
-      <p:sp>
-        <p:nvSpPr>
-          <p:cNvPr id="4" name="Rounded Rectangle 3"/>
+              <a:t>평가 및 수치 현황</a:t>
+            </a:r>
+          </a:p>
+        </p:txBody>
+      </p:sp>
+      <p:sp>
+        <p:nvSpPr>
+          <p:cNvPr id="4" name="TextBox 3"/>
+          <p:cNvSpPr txBox="1"/>
+          <p:nvPr/>
+        </p:nvSpPr>
+        <p:spPr>
+          <a:xfrm>
+            <a:off x="8366760" y="182880"/>
+            <a:ext cx="3291840" cy="228600"/>
+          </a:xfrm>
+          <a:prstGeom prst="rect">
+            <a:avLst/>
+          </a:prstGeom>
+          <a:noFill/>
+        </p:spPr>
+        <p:txBody>
+          <a:bodyPr wrap="none">
+            <a:spAutoFit/>
+          </a:bodyPr>
+          <a:lstStyle/>
+          <a:p>
+            <a:pPr algn="r"/>
+            <a:r>
+              <a:rPr sz="1100">
+                <a:solidFill>
+                  <a:srgbClr val="BFCDE0"/>
+                </a:solidFill>
+              </a:rPr>
+              <a:t>2026-03-23 기준</a:t>
+            </a:r>
+          </a:p>
+        </p:txBody>
+      </p:sp>
+      <p:sp>
+        <p:nvSpPr>
+          <p:cNvPr id="5" name="Rounded Rectangle 4"/>
           <p:cNvSpPr/>
           <p:nvPr/>
         </p:nvSpPr>
         <p:spPr>
           <a:xfrm>
-            <a:off x="731520" y="1371600"/>
-            <a:ext cx="5120640" cy="4389120"/>
+            <a:off x="731520" y="1280160"/>
+            <a:ext cx="5074920" cy="1234440"/>
           </a:xfrm>
           <a:prstGeom prst="roundRect">
             <a:avLst/>
@@ -5013,7 +5370,7 @@
           </a:solidFill>
           <a:ln>
             <a:solidFill>
-              <a:srgbClr val="22C55E"/>
+              <a:srgbClr val="1AA39A"/>
             </a:solidFill>
           </a:ln>
         </p:spPr>
@@ -5041,14 +5398,14 @@
       </p:sp>
       <p:sp>
         <p:nvSpPr>
-          <p:cNvPr id="5" name="TextBox 4"/>
+          <p:cNvPr id="6" name="TextBox 5"/>
           <p:cNvSpPr txBox="1"/>
           <p:nvPr/>
         </p:nvSpPr>
         <p:spPr>
           <a:xfrm>
-            <a:off x="932688" y="1554480"/>
-            <a:ext cx="4572000" cy="365760"/>
+            <a:off x="896112" y="1389888"/>
+            <a:ext cx="4663440" cy="256032"/>
           </a:xfrm>
           <a:prstGeom prst="rect">
             <a:avLst/>
@@ -5062,26 +5419,26 @@
           <a:lstStyle/>
           <a:p>
             <a:r>
-              <a:rPr sz="2200" b="1">
-                <a:solidFill>
-                  <a:srgbClr val="F1F5F9"/>
+              <a:rPr sz="1400">
+                <a:solidFill>
+                  <a:srgbClr val="7890AD"/>
                 </a:solidFill>
               </a:rPr>
-              <a:t>완료/강점</a:t>
-            </a:r>
-          </a:p>
-        </p:txBody>
-      </p:sp>
-      <p:sp>
-        <p:nvSpPr>
-          <p:cNvPr id="6" name="TextBox 5"/>
+              <a:t>라이브러리 벤치마크</a:t>
+            </a:r>
+          </a:p>
+        </p:txBody>
+      </p:sp>
+      <p:sp>
+        <p:nvSpPr>
+          <p:cNvPr id="7" name="TextBox 6"/>
           <p:cNvSpPr txBox="1"/>
           <p:nvPr/>
         </p:nvSpPr>
         <p:spPr>
           <a:xfrm>
-            <a:off x="960120" y="2011680"/>
-            <a:ext cx="4572000" cy="3291840"/>
+            <a:off x="896112" y="1664208"/>
+            <a:ext cx="4663440" cy="329184"/>
           </a:xfrm>
           <a:prstGeom prst="rect">
             <a:avLst/>
@@ -5094,77 +5451,60 @@
           </a:bodyPr>
           <a:lstStyle/>
           <a:p>
-            <a:pPr>
-              <a:spcAft>
-                <a:spcPts val="800"/>
-              </a:spcAft>
-              <a:defRPr sz="1800">
+            <a:r>
+              <a:rPr sz="2200" b="1">
+                <a:solidFill>
+                  <a:srgbClr val="F1F5F9"/>
+                </a:solidFill>
+              </a:rPr>
+              <a:t>안정화</a:t>
+            </a:r>
+          </a:p>
+        </p:txBody>
+      </p:sp>
+      <p:sp>
+        <p:nvSpPr>
+          <p:cNvPr id="8" name="TextBox 7"/>
+          <p:cNvSpPr txBox="1"/>
+          <p:nvPr/>
+        </p:nvSpPr>
+        <p:spPr>
+          <a:xfrm>
+            <a:off x="896112" y="2066544"/>
+            <a:ext cx="4663440" cy="256032"/>
+          </a:xfrm>
+          <a:prstGeom prst="rect">
+            <a:avLst/>
+          </a:prstGeom>
+          <a:noFill/>
+        </p:spPr>
+        <p:txBody>
+          <a:bodyPr wrap="none">
+            <a:spAutoFit/>
+          </a:bodyPr>
+          <a:lstStyle/>
+          <a:p>
+            <a:r>
+              <a:rPr sz="1100">
                 <a:solidFill>
                   <a:srgbClr val="BFCDE0"/>
                 </a:solidFill>
-              </a:defRPr>
-            </a:pPr>
-            <a:r>
-              <a:t>문서 업로드/파싱/청킹/벡터저장 구조 안정화</a:t>
-            </a:r>
-          </a:p>
-          <a:p>
-            <a:pPr>
-              <a:spcAft>
-                <a:spcPts val="800"/>
-              </a:spcAft>
-              <a:defRPr sz="1800">
-                <a:solidFill>
-                  <a:srgbClr val="BFCDE0"/>
-                </a:solidFill>
-              </a:defRPr>
-            </a:pPr>
-            <a:r>
-              <a:t>하이브리드 검색 + 문서 스코프 QA 동작</a:t>
-            </a:r>
-          </a:p>
-          <a:p>
-            <a:pPr>
-              <a:spcAft>
-                <a:spcPts val="800"/>
-              </a:spcAft>
-              <a:defRPr sz="1800">
-                <a:solidFill>
-                  <a:srgbClr val="BFCDE0"/>
-                </a:solidFill>
-              </a:defRPr>
-            </a:pPr>
-            <a:r>
-              <a:t>업로드 재선택 UI, 다중 업로드, 비교용 문서 선택 지원</a:t>
-            </a:r>
-          </a:p>
-          <a:p>
-            <a:pPr>
-              <a:spcAft>
-                <a:spcPts val="800"/>
-              </a:spcAft>
-              <a:defRPr sz="1800">
-                <a:solidFill>
-                  <a:srgbClr val="BFCDE0"/>
-                </a:solidFill>
-              </a:defRPr>
-            </a:pPr>
-            <a:r>
-              <a:t>라이브러리/업로드 벤치마크 기반선 확보</a:t>
-            </a:r>
-          </a:p>
-        </p:txBody>
-      </p:sp>
-      <p:sp>
-        <p:nvSpPr>
-          <p:cNvPr id="7" name="Rounded Rectangle 6"/>
+              </a:rPr>
+              <a:t>기존 문서 QA 기준선 확보</a:t>
+            </a:r>
+          </a:p>
+        </p:txBody>
+      </p:sp>
+      <p:sp>
+        <p:nvSpPr>
+          <p:cNvPr id="9" name="Rounded Rectangle 8"/>
           <p:cNvSpPr/>
           <p:nvPr/>
         </p:nvSpPr>
         <p:spPr>
           <a:xfrm>
-            <a:off x="6400800" y="1371600"/>
-            <a:ext cx="5120640" cy="4389120"/>
+            <a:off x="6309360" y="1280160"/>
+            <a:ext cx="5074920" cy="1234440"/>
           </a:xfrm>
           <a:prstGeom prst="roundRect">
             <a:avLst/>
@@ -5202,14 +5542,14 @@
       </p:sp>
       <p:sp>
         <p:nvSpPr>
-          <p:cNvPr id="8" name="TextBox 7"/>
+          <p:cNvPr id="10" name="TextBox 9"/>
           <p:cNvSpPr txBox="1"/>
           <p:nvPr/>
         </p:nvSpPr>
         <p:spPr>
           <a:xfrm>
-            <a:off x="6601968" y="1554480"/>
-            <a:ext cx="4572000" cy="365760"/>
+            <a:off x="6473952" y="1389888"/>
+            <a:ext cx="4663440" cy="256032"/>
           </a:xfrm>
           <a:prstGeom prst="rect">
             <a:avLst/>
@@ -5223,26 +5563,26 @@
           <a:lstStyle/>
           <a:p>
             <a:r>
-              <a:rPr sz="2200" b="1">
-                <a:solidFill>
-                  <a:srgbClr val="F1F5F9"/>
+              <a:rPr sz="1400">
+                <a:solidFill>
+                  <a:srgbClr val="7890AD"/>
                 </a:solidFill>
               </a:rPr>
-              <a:t>현재 병목</a:t>
-            </a:r>
-          </a:p>
-        </p:txBody>
-      </p:sp>
-      <p:sp>
-        <p:nvSpPr>
-          <p:cNvPr id="9" name="TextBox 8"/>
+              <a:t>업로드 벤치마크</a:t>
+            </a:r>
+          </a:p>
+        </p:txBody>
+      </p:sp>
+      <p:sp>
+        <p:nvSpPr>
+          <p:cNvPr id="11" name="TextBox 10"/>
           <p:cNvSpPr txBox="1"/>
           <p:nvPr/>
         </p:nvSpPr>
         <p:spPr>
           <a:xfrm>
-            <a:off x="6629400" y="2011680"/>
-            <a:ext cx="4572000" cy="3291840"/>
+            <a:off x="6473952" y="1664208"/>
+            <a:ext cx="4663440" cy="329184"/>
           </a:xfrm>
           <a:prstGeom prst="rect">
             <a:avLst/>
@@ -5255,63 +5595,622 @@
           </a:bodyPr>
           <a:lstStyle/>
           <a:p>
-            <a:pPr>
-              <a:spcAft>
-                <a:spcPts val="800"/>
-              </a:spcAft>
-              <a:defRPr sz="1800">
+            <a:r>
+              <a:rPr sz="2200" b="1">
+                <a:solidFill>
+                  <a:srgbClr val="F1F5F9"/>
+                </a:solidFill>
+              </a:rPr>
+              <a:t>8 rows / 소스 재현성 1.0</a:t>
+            </a:r>
+          </a:p>
+        </p:txBody>
+      </p:sp>
+      <p:sp>
+        <p:nvSpPr>
+          <p:cNvPr id="12" name="TextBox 11"/>
+          <p:cNvSpPr txBox="1"/>
+          <p:nvPr/>
+        </p:nvSpPr>
+        <p:spPr>
+          <a:xfrm>
+            <a:off x="6473952" y="2066544"/>
+            <a:ext cx="4663440" cy="256032"/>
+          </a:xfrm>
+          <a:prstGeom prst="rect">
+            <a:avLst/>
+          </a:prstGeom>
+          <a:noFill/>
+        </p:spPr>
+        <p:txBody>
+          <a:bodyPr wrap="none">
+            <a:spAutoFit/>
+          </a:bodyPr>
+          <a:lstStyle/>
+          <a:p>
+            <a:r>
+              <a:rPr sz="1100">
                 <a:solidFill>
                   <a:srgbClr val="BFCDE0"/>
                 </a:solidFill>
-              </a:defRPr>
-            </a:pPr>
-            <a:r>
-              <a:t>Layer 9B: 검색 지연시간/런타임 최적화</a:t>
-            </a:r>
-          </a:p>
-          <a:p>
-            <a:pPr>
-              <a:spcAft>
-                <a:spcPts val="800"/>
-              </a:spcAft>
-              <a:defRPr sz="1800">
+              </a:rPr>
+              <a:t>번들 PDF 모호성/거절 케이스 포함</a:t>
+            </a:r>
+          </a:p>
+        </p:txBody>
+      </p:sp>
+      <p:sp>
+        <p:nvSpPr>
+          <p:cNvPr id="13" name="Rounded Rectangle 12"/>
+          <p:cNvSpPr/>
+          <p:nvPr/>
+        </p:nvSpPr>
+        <p:spPr>
+          <a:xfrm>
+            <a:off x="731520" y="2880360"/>
+            <a:ext cx="5074920" cy="1234440"/>
+          </a:xfrm>
+          <a:prstGeom prst="roundRect">
+            <a:avLst/>
+          </a:prstGeom>
+          <a:solidFill>
+            <a:srgbClr val="152035"/>
+          </a:solidFill>
+          <a:ln>
+            <a:solidFill>
+              <a:srgbClr val="1AA39A"/>
+            </a:solidFill>
+          </a:ln>
+        </p:spPr>
+        <p:style>
+          <a:lnRef idx="1">
+            <a:schemeClr val="accent1"/>
+          </a:lnRef>
+          <a:fillRef idx="3">
+            <a:schemeClr val="accent1"/>
+          </a:fillRef>
+          <a:effectRef idx="2">
+            <a:schemeClr val="accent1"/>
+          </a:effectRef>
+          <a:fontRef idx="minor">
+            <a:schemeClr val="lt1"/>
+          </a:fontRef>
+        </p:style>
+        <p:txBody>
+          <a:bodyPr rtlCol="0" anchor="ctr"/>
+          <a:lstStyle/>
+          <a:p>
+            <a:pPr algn="ctr"/>
+          </a:p>
+        </p:txBody>
+      </p:sp>
+      <p:sp>
+        <p:nvSpPr>
+          <p:cNvPr id="14" name="TextBox 13"/>
+          <p:cNvSpPr txBox="1"/>
+          <p:nvPr/>
+        </p:nvSpPr>
+        <p:spPr>
+          <a:xfrm>
+            <a:off x="896112" y="2990088"/>
+            <a:ext cx="4663440" cy="256032"/>
+          </a:xfrm>
+          <a:prstGeom prst="rect">
+            <a:avLst/>
+          </a:prstGeom>
+          <a:noFill/>
+        </p:spPr>
+        <p:txBody>
+          <a:bodyPr wrap="none">
+            <a:spAutoFit/>
+          </a:bodyPr>
+          <a:lstStyle/>
+          <a:p>
+            <a:r>
+              <a:rPr sz="1400">
+                <a:solidFill>
+                  <a:srgbClr val="7890AD"/>
+                </a:solidFill>
+              </a:rPr>
+              <a:t>업로드 평균 답변 recall</a:t>
+            </a:r>
+          </a:p>
+        </p:txBody>
+      </p:sp>
+      <p:sp>
+        <p:nvSpPr>
+          <p:cNvPr id="15" name="TextBox 14"/>
+          <p:cNvSpPr txBox="1"/>
+          <p:nvPr/>
+        </p:nvSpPr>
+        <p:spPr>
+          <a:xfrm>
+            <a:off x="896112" y="3264408"/>
+            <a:ext cx="4663440" cy="329184"/>
+          </a:xfrm>
+          <a:prstGeom prst="rect">
+            <a:avLst/>
+          </a:prstGeom>
+          <a:noFill/>
+        </p:spPr>
+        <p:txBody>
+          <a:bodyPr wrap="none">
+            <a:spAutoFit/>
+          </a:bodyPr>
+          <a:lstStyle/>
+          <a:p>
+            <a:r>
+              <a:rPr sz="2200" b="1">
+                <a:solidFill>
+                  <a:srgbClr val="F1F5F9"/>
+                </a:solidFill>
+              </a:rPr>
+              <a:t>0.896</a:t>
+            </a:r>
+          </a:p>
+        </p:txBody>
+      </p:sp>
+      <p:sp>
+        <p:nvSpPr>
+          <p:cNvPr id="16" name="TextBox 15"/>
+          <p:cNvSpPr txBox="1"/>
+          <p:nvPr/>
+        </p:nvSpPr>
+        <p:spPr>
+          <a:xfrm>
+            <a:off x="896112" y="3666744"/>
+            <a:ext cx="4663440" cy="256032"/>
+          </a:xfrm>
+          <a:prstGeom prst="rect">
+            <a:avLst/>
+          </a:prstGeom>
+          <a:noFill/>
+        </p:spPr>
+        <p:txBody>
+          <a:bodyPr wrap="none">
+            <a:spAutoFit/>
+          </a:bodyPr>
+          <a:lstStyle/>
+          <a:p>
+            <a:r>
+              <a:rPr sz="1100">
                 <a:solidFill>
                   <a:srgbClr val="BFCDE0"/>
                 </a:solidFill>
-              </a:defRPr>
-            </a:pPr>
-            <a:r>
-              <a:t>재정렬기는 품질 향상은 있으나 실시간 비용이 큼</a:t>
-            </a:r>
-          </a:p>
-          <a:p>
-            <a:pPr>
-              <a:spcAft>
-                <a:spcPts val="800"/>
-              </a:spcAft>
-              <a:defRPr sz="1800">
+              </a:rPr>
+              <a:t>핵심 포인트 회수율 양호</a:t>
+            </a:r>
+          </a:p>
+        </p:txBody>
+      </p:sp>
+      <p:sp>
+        <p:nvSpPr>
+          <p:cNvPr id="17" name="Rounded Rectangle 16"/>
+          <p:cNvSpPr/>
+          <p:nvPr/>
+        </p:nvSpPr>
+        <p:spPr>
+          <a:xfrm>
+            <a:off x="6309360" y="2880360"/>
+            <a:ext cx="5074920" cy="1234440"/>
+          </a:xfrm>
+          <a:prstGeom prst="roundRect">
+            <a:avLst/>
+          </a:prstGeom>
+          <a:solidFill>
+            <a:srgbClr val="152035"/>
+          </a:solidFill>
+          <a:ln>
+            <a:solidFill>
+              <a:srgbClr val="F59E0B"/>
+            </a:solidFill>
+          </a:ln>
+        </p:spPr>
+        <p:style>
+          <a:lnRef idx="1">
+            <a:schemeClr val="accent1"/>
+          </a:lnRef>
+          <a:fillRef idx="3">
+            <a:schemeClr val="accent1"/>
+          </a:fillRef>
+          <a:effectRef idx="2">
+            <a:schemeClr val="accent1"/>
+          </a:effectRef>
+          <a:fontRef idx="minor">
+            <a:schemeClr val="lt1"/>
+          </a:fontRef>
+        </p:style>
+        <p:txBody>
+          <a:bodyPr rtlCol="0" anchor="ctr"/>
+          <a:lstStyle/>
+          <a:p>
+            <a:pPr algn="ctr"/>
+          </a:p>
+        </p:txBody>
+      </p:sp>
+      <p:sp>
+        <p:nvSpPr>
+          <p:cNvPr id="18" name="TextBox 17"/>
+          <p:cNvSpPr txBox="1"/>
+          <p:nvPr/>
+        </p:nvSpPr>
+        <p:spPr>
+          <a:xfrm>
+            <a:off x="6473952" y="2990088"/>
+            <a:ext cx="4663440" cy="256032"/>
+          </a:xfrm>
+          <a:prstGeom prst="rect">
+            <a:avLst/>
+          </a:prstGeom>
+          <a:noFill/>
+        </p:spPr>
+        <p:txBody>
+          <a:bodyPr wrap="none">
+            <a:spAutoFit/>
+          </a:bodyPr>
+          <a:lstStyle/>
+          <a:p>
+            <a:r>
+              <a:rPr sz="1400">
+                <a:solidFill>
+                  <a:srgbClr val="7890AD"/>
+                </a:solidFill>
+              </a:rPr>
+              <a:t>검색 지연시간</a:t>
+            </a:r>
+          </a:p>
+        </p:txBody>
+      </p:sp>
+      <p:sp>
+        <p:nvSpPr>
+          <p:cNvPr id="19" name="TextBox 18"/>
+          <p:cNvSpPr txBox="1"/>
+          <p:nvPr/>
+        </p:nvSpPr>
+        <p:spPr>
+          <a:xfrm>
+            <a:off x="6473952" y="3264408"/>
+            <a:ext cx="4663440" cy="329184"/>
+          </a:xfrm>
+          <a:prstGeom prst="rect">
+            <a:avLst/>
+          </a:prstGeom>
+          <a:noFill/>
+        </p:spPr>
+        <p:txBody>
+          <a:bodyPr wrap="none">
+            <a:spAutoFit/>
+          </a:bodyPr>
+          <a:lstStyle/>
+          <a:p>
+            <a:r>
+              <a:rPr sz="2200" b="1">
+                <a:solidFill>
+                  <a:srgbClr val="F1F5F9"/>
+                </a:solidFill>
+              </a:rPr>
+              <a:t>Hybrid 8.9ms</a:t>
+            </a:r>
+          </a:p>
+        </p:txBody>
+      </p:sp>
+      <p:sp>
+        <p:nvSpPr>
+          <p:cNvPr id="20" name="TextBox 19"/>
+          <p:cNvSpPr txBox="1"/>
+          <p:nvPr/>
+        </p:nvSpPr>
+        <p:spPr>
+          <a:xfrm>
+            <a:off x="6473952" y="3666744"/>
+            <a:ext cx="4663440" cy="256032"/>
+          </a:xfrm>
+          <a:prstGeom prst="rect">
+            <a:avLst/>
+          </a:prstGeom>
+          <a:noFill/>
+        </p:spPr>
+        <p:txBody>
+          <a:bodyPr wrap="none">
+            <a:spAutoFit/>
+          </a:bodyPr>
+          <a:lstStyle/>
+          <a:p>
+            <a:r>
+              <a:rPr sz="1100">
                 <a:solidFill>
                   <a:srgbClr val="BFCDE0"/>
                 </a:solidFill>
-              </a:defRPr>
-            </a:pPr>
-            <a:r>
-              <a:t>비교형 PDF QA는 구현되었지만 검증은 시작 단계</a:t>
-            </a:r>
-          </a:p>
-          <a:p>
-            <a:pPr>
-              <a:spcAft>
-                <a:spcPts val="800"/>
-              </a:spcAft>
-              <a:defRPr sz="1800">
+              </a:rPr>
+              <a:t>업로드 기준</a:t>
+            </a:r>
+          </a:p>
+        </p:txBody>
+      </p:sp>
+      <p:sp>
+        <p:nvSpPr>
+          <p:cNvPr id="21" name="Rounded Rectangle 20"/>
+          <p:cNvSpPr/>
+          <p:nvPr/>
+        </p:nvSpPr>
+        <p:spPr>
+          <a:xfrm>
+            <a:off x="731520" y="4480560"/>
+            <a:ext cx="5074920" cy="1234440"/>
+          </a:xfrm>
+          <a:prstGeom prst="roundRect">
+            <a:avLst/>
+          </a:prstGeom>
+          <a:solidFill>
+            <a:srgbClr val="152035"/>
+          </a:solidFill>
+          <a:ln>
+            <a:solidFill>
+              <a:srgbClr val="1AA39A"/>
+            </a:solidFill>
+          </a:ln>
+        </p:spPr>
+        <p:style>
+          <a:lnRef idx="1">
+            <a:schemeClr val="accent1"/>
+          </a:lnRef>
+          <a:fillRef idx="3">
+            <a:schemeClr val="accent1"/>
+          </a:fillRef>
+          <a:effectRef idx="2">
+            <a:schemeClr val="accent1"/>
+          </a:effectRef>
+          <a:fontRef idx="minor">
+            <a:schemeClr val="lt1"/>
+          </a:fontRef>
+        </p:style>
+        <p:txBody>
+          <a:bodyPr rtlCol="0" anchor="ctr"/>
+          <a:lstStyle/>
+          <a:p>
+            <a:pPr algn="ctr"/>
+          </a:p>
+        </p:txBody>
+      </p:sp>
+      <p:sp>
+        <p:nvSpPr>
+          <p:cNvPr id="22" name="TextBox 21"/>
+          <p:cNvSpPr txBox="1"/>
+          <p:nvPr/>
+        </p:nvSpPr>
+        <p:spPr>
+          <a:xfrm>
+            <a:off x="896112" y="4590288"/>
+            <a:ext cx="4663440" cy="256032"/>
+          </a:xfrm>
+          <a:prstGeom prst="rect">
+            <a:avLst/>
+          </a:prstGeom>
+          <a:noFill/>
+        </p:spPr>
+        <p:txBody>
+          <a:bodyPr wrap="none">
+            <a:spAutoFit/>
+          </a:bodyPr>
+          <a:lstStyle/>
+          <a:p>
+            <a:r>
+              <a:rPr sz="1400">
+                <a:solidFill>
+                  <a:srgbClr val="7890AD"/>
+                </a:solidFill>
+              </a:rPr>
+              <a:t>재정렬 지연시간</a:t>
+            </a:r>
+          </a:p>
+        </p:txBody>
+      </p:sp>
+      <p:sp>
+        <p:nvSpPr>
+          <p:cNvPr id="23" name="TextBox 22"/>
+          <p:cNvSpPr txBox="1"/>
+          <p:nvPr/>
+        </p:nvSpPr>
+        <p:spPr>
+          <a:xfrm>
+            <a:off x="896112" y="4864608"/>
+            <a:ext cx="4663440" cy="329184"/>
+          </a:xfrm>
+          <a:prstGeom prst="rect">
+            <a:avLst/>
+          </a:prstGeom>
+          <a:noFill/>
+        </p:spPr>
+        <p:txBody>
+          <a:bodyPr wrap="none">
+            <a:spAutoFit/>
+          </a:bodyPr>
+          <a:lstStyle/>
+          <a:p>
+            <a:r>
+              <a:rPr sz="2200" b="1">
+                <a:solidFill>
+                  <a:srgbClr val="F1F5F9"/>
+                </a:solidFill>
+              </a:rPr>
+              <a:t>Hybrid+Rerank 6692ms</a:t>
+            </a:r>
+          </a:p>
+        </p:txBody>
+      </p:sp>
+      <p:sp>
+        <p:nvSpPr>
+          <p:cNvPr id="24" name="TextBox 23"/>
+          <p:cNvSpPr txBox="1"/>
+          <p:nvPr/>
+        </p:nvSpPr>
+        <p:spPr>
+          <a:xfrm>
+            <a:off x="896112" y="5266944"/>
+            <a:ext cx="4663440" cy="256032"/>
+          </a:xfrm>
+          <a:prstGeom prst="rect">
+            <a:avLst/>
+          </a:prstGeom>
+          <a:noFill/>
+        </p:spPr>
+        <p:txBody>
+          <a:bodyPr wrap="none">
+            <a:spAutoFit/>
+          </a:bodyPr>
+          <a:lstStyle/>
+          <a:p>
+            <a:r>
+              <a:rPr sz="1100">
                 <a:solidFill>
                   <a:srgbClr val="BFCDE0"/>
                 </a:solidFill>
-              </a:defRPr>
-            </a:pPr>
-            <a:r>
-              <a:t>QLoRA는 학습 스크립트/데이터 준비 단계</a:t>
+              </a:rPr>
+              <a:t>정확도 향상 있으나 실시간 채팅에는 과도</a:t>
+            </a:r>
+          </a:p>
+        </p:txBody>
+      </p:sp>
+      <p:sp>
+        <p:nvSpPr>
+          <p:cNvPr id="25" name="Rounded Rectangle 24"/>
+          <p:cNvSpPr/>
+          <p:nvPr/>
+        </p:nvSpPr>
+        <p:spPr>
+          <a:xfrm>
+            <a:off x="6309360" y="4480560"/>
+            <a:ext cx="5074920" cy="1234440"/>
+          </a:xfrm>
+          <a:prstGeom prst="roundRect">
+            <a:avLst/>
+          </a:prstGeom>
+          <a:solidFill>
+            <a:srgbClr val="152035"/>
+          </a:solidFill>
+          <a:ln>
+            <a:solidFill>
+              <a:srgbClr val="F59E0B"/>
+            </a:solidFill>
+          </a:ln>
+        </p:spPr>
+        <p:style>
+          <a:lnRef idx="1">
+            <a:schemeClr val="accent1"/>
+          </a:lnRef>
+          <a:fillRef idx="3">
+            <a:schemeClr val="accent1"/>
+          </a:fillRef>
+          <a:effectRef idx="2">
+            <a:schemeClr val="accent1"/>
+          </a:effectRef>
+          <a:fontRef idx="minor">
+            <a:schemeClr val="lt1"/>
+          </a:fontRef>
+        </p:style>
+        <p:txBody>
+          <a:bodyPr rtlCol="0" anchor="ctr"/>
+          <a:lstStyle/>
+          <a:p>
+            <a:pPr algn="ctr"/>
+          </a:p>
+        </p:txBody>
+      </p:sp>
+      <p:sp>
+        <p:nvSpPr>
+          <p:cNvPr id="26" name="TextBox 25"/>
+          <p:cNvSpPr txBox="1"/>
+          <p:nvPr/>
+        </p:nvSpPr>
+        <p:spPr>
+          <a:xfrm>
+            <a:off x="6473952" y="4590288"/>
+            <a:ext cx="4663440" cy="256032"/>
+          </a:xfrm>
+          <a:prstGeom prst="rect">
+            <a:avLst/>
+          </a:prstGeom>
+          <a:noFill/>
+        </p:spPr>
+        <p:txBody>
+          <a:bodyPr wrap="none">
+            <a:spAutoFit/>
+          </a:bodyPr>
+          <a:lstStyle/>
+          <a:p>
+            <a:r>
+              <a:rPr sz="1400">
+                <a:solidFill>
+                  <a:srgbClr val="7890AD"/>
+                </a:solidFill>
+              </a:rPr>
+              <a:t>QLoRA 학습 데이터</a:t>
+            </a:r>
+          </a:p>
+        </p:txBody>
+      </p:sp>
+      <p:sp>
+        <p:nvSpPr>
+          <p:cNvPr id="27" name="TextBox 26"/>
+          <p:cNvSpPr txBox="1"/>
+          <p:nvPr/>
+        </p:nvSpPr>
+        <p:spPr>
+          <a:xfrm>
+            <a:off x="6473952" y="4864608"/>
+            <a:ext cx="4663440" cy="329184"/>
+          </a:xfrm>
+          <a:prstGeom prst="rect">
+            <a:avLst/>
+          </a:prstGeom>
+          <a:noFill/>
+        </p:spPr>
+        <p:txBody>
+          <a:bodyPr wrap="none">
+            <a:spAutoFit/>
+          </a:bodyPr>
+          <a:lstStyle/>
+          <a:p>
+            <a:r>
+              <a:rPr sz="2200" b="1">
+                <a:solidFill>
+                  <a:srgbClr val="F1F5F9"/>
+                </a:solidFill>
+              </a:rPr>
+              <a:t>25 rows</a:t>
+            </a:r>
+          </a:p>
+        </p:txBody>
+      </p:sp>
+      <p:sp>
+        <p:nvSpPr>
+          <p:cNvPr id="28" name="TextBox 27"/>
+          <p:cNvSpPr txBox="1"/>
+          <p:nvPr/>
+        </p:nvSpPr>
+        <p:spPr>
+          <a:xfrm>
+            <a:off x="6473952" y="5266944"/>
+            <a:ext cx="4663440" cy="256032"/>
+          </a:xfrm>
+          <a:prstGeom prst="rect">
+            <a:avLst/>
+          </a:prstGeom>
+          <a:noFill/>
+        </p:spPr>
+        <p:txBody>
+          <a:bodyPr wrap="none">
+            <a:spAutoFit/>
+          </a:bodyPr>
+          <a:lstStyle/>
+          <a:p>
+            <a:r>
+              <a:rPr sz="1100">
+                <a:solidFill>
+                  <a:srgbClr val="BFCDE0"/>
+                </a:solidFill>
+              </a:rPr>
+              <a:t>한글 20 / 영어 5</a:t>
             </a:r>
           </a:p>
         </p:txBody>
@@ -5413,21 +6312,66 @@
                   <a:srgbClr val="F1F5F9"/>
                 </a:solidFill>
               </a:rPr>
-              <a:t>UI 및 사용자 흐름 현황</a:t>
-            </a:r>
-          </a:p>
-        </p:txBody>
-      </p:sp>
-      <p:sp>
-        <p:nvSpPr>
-          <p:cNvPr id="4" name="TextBox 3"/>
+              <a:t>현재 단계와 병목</a:t>
+            </a:r>
+          </a:p>
+        </p:txBody>
+      </p:sp>
+      <p:sp>
+        <p:nvSpPr>
+          <p:cNvPr id="4" name="Rounded Rectangle 3"/>
+          <p:cNvSpPr/>
+          <p:nvPr/>
+        </p:nvSpPr>
+        <p:spPr>
+          <a:xfrm>
+            <a:off x="731520" y="1371600"/>
+            <a:ext cx="5120640" cy="4389120"/>
+          </a:xfrm>
+          <a:prstGeom prst="roundRect">
+            <a:avLst/>
+          </a:prstGeom>
+          <a:solidFill>
+            <a:srgbClr val="152035"/>
+          </a:solidFill>
+          <a:ln>
+            <a:solidFill>
+              <a:srgbClr val="22C55E"/>
+            </a:solidFill>
+          </a:ln>
+        </p:spPr>
+        <p:style>
+          <a:lnRef idx="1">
+            <a:schemeClr val="accent1"/>
+          </a:lnRef>
+          <a:fillRef idx="3">
+            <a:schemeClr val="accent1"/>
+          </a:fillRef>
+          <a:effectRef idx="2">
+            <a:schemeClr val="accent1"/>
+          </a:effectRef>
+          <a:fontRef idx="minor">
+            <a:schemeClr val="lt1"/>
+          </a:fontRef>
+        </p:style>
+        <p:txBody>
+          <a:bodyPr rtlCol="0" anchor="ctr"/>
+          <a:lstStyle/>
+          <a:p>
+            <a:pPr algn="ctr"/>
+          </a:p>
+        </p:txBody>
+      </p:sp>
+      <p:sp>
+        <p:nvSpPr>
+          <p:cNvPr id="5" name="TextBox 4"/>
           <p:cNvSpPr txBox="1"/>
           <p:nvPr/>
         </p:nvSpPr>
         <p:spPr>
           <a:xfrm>
-            <a:off x="640080" y="1143000"/>
-            <a:ext cx="10972800" cy="5303520"/>
+            <a:off x="932688" y="1554480"/>
+            <a:ext cx="4572000" cy="365760"/>
           </a:xfrm>
           <a:prstGeom prst="rect">
             <a:avLst/>
@@ -5435,68 +6379,262 @@
           <a:noFill/>
         </p:spPr>
         <p:txBody>
-          <a:bodyPr wrap="square">
+          <a:bodyPr wrap="none">
             <a:spAutoFit/>
           </a:bodyPr>
           <a:lstStyle/>
           <a:p>
+            <a:r>
+              <a:rPr sz="2200" b="1">
+                <a:solidFill>
+                  <a:srgbClr val="F1F5F9"/>
+                </a:solidFill>
+              </a:rPr>
+              <a:t>완료/강점</a:t>
+            </a:r>
+          </a:p>
+        </p:txBody>
+      </p:sp>
+      <p:sp>
+        <p:nvSpPr>
+          <p:cNvPr id="6" name="TextBox 5"/>
+          <p:cNvSpPr txBox="1"/>
+          <p:nvPr/>
+        </p:nvSpPr>
+        <p:spPr>
+          <a:xfrm>
+            <a:off x="960120" y="2011680"/>
+            <a:ext cx="4572000" cy="3291840"/>
+          </a:xfrm>
+          <a:prstGeom prst="rect">
+            <a:avLst/>
+          </a:prstGeom>
+          <a:noFill/>
+        </p:spPr>
+        <p:txBody>
+          <a:bodyPr wrap="none">
+            <a:spAutoFit/>
+          </a:bodyPr>
+          <a:lstStyle/>
+          <a:p>
             <a:pPr>
               <a:spcAft>
-                <a:spcPts val="1000"/>
+                <a:spcPts val="800"/>
               </a:spcAft>
-              <a:defRPr sz="2200">
-                <a:solidFill>
-                  <a:srgbClr val="F1F5F9"/>
+              <a:defRPr sz="1800">
+                <a:solidFill>
+                  <a:srgbClr val="BFCDE0"/>
                 </a:solidFill>
               </a:defRPr>
             </a:pPr>
             <a:r>
-              <a:t>웹 UI 기준으로 한 번에 여러 파일 업로드 가능</a:t>
+              <a:t>문서 업로드/파싱/청킹/벡터저장 구조 안정화</a:t>
             </a:r>
           </a:p>
           <a:p>
             <a:pPr>
               <a:spcAft>
-                <a:spcPts val="1000"/>
+                <a:spcPts val="800"/>
               </a:spcAft>
-              <a:defRPr sz="2200">
-                <a:solidFill>
-                  <a:srgbClr val="F1F5F9"/>
+              <a:defRPr sz="1800">
+                <a:solidFill>
+                  <a:srgbClr val="BFCDE0"/>
                 </a:solidFill>
               </a:defRPr>
             </a:pPr>
             <a:r>
-              <a:t>업로드한 문서는 좌측 사이드바에 기억되어 재사용 가능</a:t>
+              <a:t>하이브리드 검색 + 문서 스코프 QA 동작</a:t>
             </a:r>
           </a:p>
           <a:p>
             <a:pPr>
               <a:spcAft>
-                <a:spcPts val="1000"/>
+                <a:spcPts val="800"/>
               </a:spcAft>
-              <a:defRPr sz="2200">
-                <a:solidFill>
-                  <a:srgbClr val="F1F5F9"/>
+              <a:defRPr sz="1800">
+                <a:solidFill>
+                  <a:srgbClr val="BFCDE0"/>
                 </a:solidFill>
               </a:defRPr>
             </a:pPr>
             <a:r>
-              <a:t>여러 문서를 선택하면 비교 질문 흐름으로 전환</a:t>
+              <a:t>업로드 재선택 UI, 다중 업로드, 비교용 문서 선택 지원</a:t>
             </a:r>
           </a:p>
           <a:p>
             <a:pPr>
               <a:spcAft>
-                <a:spcPts val="1000"/>
+                <a:spcPts val="800"/>
               </a:spcAft>
-              <a:defRPr sz="2200">
-                <a:solidFill>
-                  <a:srgbClr val="F1F5F9"/>
+              <a:defRPr sz="1800">
+                <a:solidFill>
+                  <a:srgbClr val="BFCDE0"/>
                 </a:solidFill>
               </a:defRPr>
             </a:pPr>
             <a:r>
-              <a:t>현재 UI는 내부 테스트용으로 충분하나, 운영용 완성도는 추가 개선 여지 존재</a:t>
+              <a:t>라이브러리/업로드 벤치마크 기반선 확보</a:t>
+            </a:r>
+          </a:p>
+        </p:txBody>
+      </p:sp>
+      <p:sp>
+        <p:nvSpPr>
+          <p:cNvPr id="7" name="Rounded Rectangle 6"/>
+          <p:cNvSpPr/>
+          <p:nvPr/>
+        </p:nvSpPr>
+        <p:spPr>
+          <a:xfrm>
+            <a:off x="6400800" y="1371600"/>
+            <a:ext cx="5120640" cy="4389120"/>
+          </a:xfrm>
+          <a:prstGeom prst="roundRect">
+            <a:avLst/>
+          </a:prstGeom>
+          <a:solidFill>
+            <a:srgbClr val="152035"/>
+          </a:solidFill>
+          <a:ln>
+            <a:solidFill>
+              <a:srgbClr val="F59E0B"/>
+            </a:solidFill>
+          </a:ln>
+        </p:spPr>
+        <p:style>
+          <a:lnRef idx="1">
+            <a:schemeClr val="accent1"/>
+          </a:lnRef>
+          <a:fillRef idx="3">
+            <a:schemeClr val="accent1"/>
+          </a:fillRef>
+          <a:effectRef idx="2">
+            <a:schemeClr val="accent1"/>
+          </a:effectRef>
+          <a:fontRef idx="minor">
+            <a:schemeClr val="lt1"/>
+          </a:fontRef>
+        </p:style>
+        <p:txBody>
+          <a:bodyPr rtlCol="0" anchor="ctr"/>
+          <a:lstStyle/>
+          <a:p>
+            <a:pPr algn="ctr"/>
+          </a:p>
+        </p:txBody>
+      </p:sp>
+      <p:sp>
+        <p:nvSpPr>
+          <p:cNvPr id="8" name="TextBox 7"/>
+          <p:cNvSpPr txBox="1"/>
+          <p:nvPr/>
+        </p:nvSpPr>
+        <p:spPr>
+          <a:xfrm>
+            <a:off x="6601968" y="1554480"/>
+            <a:ext cx="4572000" cy="365760"/>
+          </a:xfrm>
+          <a:prstGeom prst="rect">
+            <a:avLst/>
+          </a:prstGeom>
+          <a:noFill/>
+        </p:spPr>
+        <p:txBody>
+          <a:bodyPr wrap="none">
+            <a:spAutoFit/>
+          </a:bodyPr>
+          <a:lstStyle/>
+          <a:p>
+            <a:r>
+              <a:rPr sz="2200" b="1">
+                <a:solidFill>
+                  <a:srgbClr val="F1F5F9"/>
+                </a:solidFill>
+              </a:rPr>
+              <a:t>현재 병목</a:t>
+            </a:r>
+          </a:p>
+        </p:txBody>
+      </p:sp>
+      <p:sp>
+        <p:nvSpPr>
+          <p:cNvPr id="9" name="TextBox 8"/>
+          <p:cNvSpPr txBox="1"/>
+          <p:nvPr/>
+        </p:nvSpPr>
+        <p:spPr>
+          <a:xfrm>
+            <a:off x="6629400" y="2011680"/>
+            <a:ext cx="4572000" cy="3291840"/>
+          </a:xfrm>
+          <a:prstGeom prst="rect">
+            <a:avLst/>
+          </a:prstGeom>
+          <a:noFill/>
+        </p:spPr>
+        <p:txBody>
+          <a:bodyPr wrap="none">
+            <a:spAutoFit/>
+          </a:bodyPr>
+          <a:lstStyle/>
+          <a:p>
+            <a:pPr>
+              <a:spcAft>
+                <a:spcPts val="800"/>
+              </a:spcAft>
+              <a:defRPr sz="1800">
+                <a:solidFill>
+                  <a:srgbClr val="BFCDE0"/>
+                </a:solidFill>
+              </a:defRPr>
+            </a:pPr>
+            <a:r>
+              <a:t>Layer 9B: 검색 지연시간/런타임 최적화</a:t>
+            </a:r>
+          </a:p>
+          <a:p>
+            <a:pPr>
+              <a:spcAft>
+                <a:spcPts val="800"/>
+              </a:spcAft>
+              <a:defRPr sz="1800">
+                <a:solidFill>
+                  <a:srgbClr val="BFCDE0"/>
+                </a:solidFill>
+              </a:defRPr>
+            </a:pPr>
+            <a:r>
+              <a:t>재정렬기는 품질 향상은 있으나 실시간 비용이 큼</a:t>
+            </a:r>
+          </a:p>
+          <a:p>
+            <a:pPr>
+              <a:spcAft>
+                <a:spcPts val="800"/>
+              </a:spcAft>
+              <a:defRPr sz="1800">
+                <a:solidFill>
+                  <a:srgbClr val="BFCDE0"/>
+                </a:solidFill>
+              </a:defRPr>
+            </a:pPr>
+            <a:r>
+              <a:t>비교형 PDF QA는 구현되었지만 검증은 시작 단계</a:t>
+            </a:r>
+          </a:p>
+          <a:p>
+            <a:pPr>
+              <a:spcAft>
+                <a:spcPts val="800"/>
+              </a:spcAft>
+              <a:defRPr sz="1800">
+                <a:solidFill>
+                  <a:srgbClr val="BFCDE0"/>
+                </a:solidFill>
+              </a:defRPr>
+            </a:pPr>
+            <a:r>
+              <a:t>QLoRA는 학습 스크립트/데이터 준비 단계</a:t>
             </a:r>
           </a:p>
         </p:txBody>
@@ -5598,7 +6736,7 @@
                   <a:srgbClr val="F1F5F9"/>
                 </a:solidFill>
               </a:rPr>
-              <a:t>QLoRA 준비 현황</a:t>
+              <a:t>UI 및 사용자 흐름 현황</a:t>
             </a:r>
           </a:p>
         </p:txBody>
@@ -5636,7 +6774,7 @@
               </a:defRPr>
             </a:pPr>
             <a:r>
-              <a:t>학습 스크립트와 의존성 파일은 준비 완료</a:t>
+              <a:t>웹 UI 기준으로 한 번에 여러 파일 업로드 가능</a:t>
             </a:r>
           </a:p>
           <a:p>
@@ -5651,7 +6789,7 @@
               </a:defRPr>
             </a:pPr>
             <a:r>
-              <a:t>학습 데이터셋은 25개 샘플까지 확장 완료</a:t>
+              <a:t>업로드한 문서는 좌측 사이드바에 기억되어 재사용 가능</a:t>
             </a:r>
           </a:p>
           <a:p>
@@ -5666,7 +6804,7 @@
               </a:defRPr>
             </a:pPr>
             <a:r>
-              <a:t>현재 비중은 한국어 중심(20) + 영어 보조(5)</a:t>
+              <a:t>여러 문서를 선택하면 비교 질문 흐름으로 전환</a:t>
             </a:r>
           </a:p>
           <a:p>
@@ -5681,7 +6819,7 @@
               </a:defRPr>
             </a:pPr>
             <a:r>
-              <a:t>다음 단계는 비교/거절/영문 케이스를 조금 더 늘린 뒤 첫 adapter 학습 실행</a:t>
+              <a:t>현재 UI는 내부 테스트용으로 충분하나, 운영용 완성도는 추가 개선 여지 존재</a:t>
             </a:r>
           </a:p>
         </p:txBody>
@@ -5783,117 +6921,21 @@
                   <a:srgbClr val="F1F5F9"/>
                 </a:solidFill>
               </a:rPr>
-              <a:t>다음 단계 제안</a:t>
-            </a:r>
-          </a:p>
-        </p:txBody>
-      </p:sp>
-      <p:sp>
-        <p:nvSpPr>
-          <p:cNvPr id="4" name="Oval 3"/>
-          <p:cNvSpPr/>
-          <p:nvPr/>
-        </p:nvSpPr>
-        <p:spPr>
-          <a:xfrm>
-            <a:off x="1600200" y="1234440"/>
-            <a:ext cx="731520" cy="731520"/>
-          </a:xfrm>
-          <a:prstGeom prst="ellipse">
-            <a:avLst/>
-          </a:prstGeom>
-          <a:solidFill>
-            <a:srgbClr val="1AA39A"/>
-          </a:solidFill>
-          <a:ln>
-            <a:noFill/>
-          </a:ln>
-        </p:spPr>
-        <p:style>
-          <a:lnRef idx="1">
-            <a:schemeClr val="accent1"/>
-          </a:lnRef>
-          <a:fillRef idx="3">
-            <a:schemeClr val="accent1"/>
-          </a:fillRef>
-          <a:effectRef idx="2">
-            <a:schemeClr val="accent1"/>
-          </a:effectRef>
-          <a:fontRef idx="minor">
-            <a:schemeClr val="lt1"/>
-          </a:fontRef>
-        </p:style>
-        <p:txBody>
-          <a:bodyPr rtlCol="0" anchor="ctr"/>
-          <a:lstStyle/>
-          <a:p>
-            <a:pPr algn="ctr"/>
-            <a:r>
-              <a:rPr sz="2400" b="1">
-                <a:solidFill>
-                  <a:srgbClr val="0B1220"/>
-                </a:solidFill>
-              </a:rPr>
-              <a:t>1</a:t>
-            </a:r>
-          </a:p>
-        </p:txBody>
-      </p:sp>
-      <p:sp>
-        <p:nvSpPr>
-          <p:cNvPr id="5" name="Rounded Rectangle 4"/>
-          <p:cNvSpPr/>
-          <p:nvPr/>
-        </p:nvSpPr>
-        <p:spPr>
-          <a:xfrm>
-            <a:off x="731520" y="2103120"/>
-            <a:ext cx="2423160" cy="2880360"/>
-          </a:xfrm>
-          <a:prstGeom prst="roundRect">
-            <a:avLst/>
-          </a:prstGeom>
-          <a:solidFill>
-            <a:srgbClr val="152035"/>
-          </a:solidFill>
-          <a:ln>
-            <a:solidFill>
-              <a:srgbClr val="1AA39A"/>
-            </a:solidFill>
-          </a:ln>
-        </p:spPr>
-        <p:style>
-          <a:lnRef idx="1">
-            <a:schemeClr val="accent1"/>
-          </a:lnRef>
-          <a:fillRef idx="3">
-            <a:schemeClr val="accent1"/>
-          </a:fillRef>
-          <a:effectRef idx="2">
-            <a:schemeClr val="accent1"/>
-          </a:effectRef>
-          <a:fontRef idx="minor">
-            <a:schemeClr val="lt1"/>
-          </a:fontRef>
-        </p:style>
-        <p:txBody>
-          <a:bodyPr rtlCol="0" anchor="ctr"/>
-          <a:lstStyle/>
-          <a:p>
-            <a:pPr algn="ctr"/>
-          </a:p>
-        </p:txBody>
-      </p:sp>
-      <p:sp>
-        <p:nvSpPr>
-          <p:cNvPr id="6" name="TextBox 5"/>
+              <a:t>QLoRA 준비 현황</a:t>
+            </a:r>
+          </a:p>
+        </p:txBody>
+      </p:sp>
+      <p:sp>
+        <p:nvSpPr>
+          <p:cNvPr id="4" name="TextBox 3"/>
           <p:cNvSpPr txBox="1"/>
           <p:nvPr/>
         </p:nvSpPr>
         <p:spPr>
           <a:xfrm>
-            <a:off x="868680" y="2304288"/>
-            <a:ext cx="2148840" cy="365760"/>
+            <a:off x="640080" y="1143000"/>
+            <a:ext cx="10972800" cy="5303520"/>
           </a:xfrm>
           <a:prstGeom prst="rect">
             <a:avLst/>
@@ -5901,549 +6943,68 @@
           <a:noFill/>
         </p:spPr>
         <p:txBody>
-          <a:bodyPr wrap="none">
+          <a:bodyPr wrap="square">
             <a:spAutoFit/>
           </a:bodyPr>
           <a:lstStyle/>
           <a:p>
-            <a:pPr algn="ctr"/>
-            <a:r>
-              <a:rPr sz="1800" b="1">
+            <a:pPr>
+              <a:spcAft>
+                <a:spcPts val="1000"/>
+              </a:spcAft>
+              <a:defRPr sz="2200">
                 <a:solidFill>
                   <a:srgbClr val="F1F5F9"/>
                 </a:solidFill>
-              </a:rPr>
-              <a:t>검색/비교 안정화</a:t>
-            </a:r>
-          </a:p>
-        </p:txBody>
-      </p:sp>
-      <p:sp>
-        <p:nvSpPr>
-          <p:cNvPr id="7" name="TextBox 6"/>
-          <p:cNvSpPr txBox="1"/>
-          <p:nvPr/>
-        </p:nvSpPr>
-        <p:spPr>
-          <a:xfrm>
-            <a:off x="877824" y="2743200"/>
-            <a:ext cx="2103120" cy="1737360"/>
-          </a:xfrm>
-          <a:prstGeom prst="rect">
-            <a:avLst/>
-          </a:prstGeom>
-          <a:noFill/>
-        </p:spPr>
-        <p:txBody>
-          <a:bodyPr wrap="none">
-            <a:spAutoFit/>
-          </a:bodyPr>
-          <a:lstStyle/>
-          <a:p>
-            <a:pPr algn="ctr"/>
-            <a:r>
-              <a:rPr sz="1400">
-                <a:solidFill>
-                  <a:srgbClr val="BFCDE0"/>
-                </a:solidFill>
-              </a:rPr>
-              <a:t>비교형 PDF 벤치마크 실행
-비교 응답 품질 점검 및 보정</a:t>
-            </a:r>
-          </a:p>
-        </p:txBody>
-      </p:sp>
-      <p:sp>
-        <p:nvSpPr>
-          <p:cNvPr id="8" name="Oval 7"/>
-          <p:cNvSpPr/>
-          <p:nvPr/>
-        </p:nvSpPr>
-        <p:spPr>
-          <a:xfrm>
-            <a:off x="4434840" y="1234440"/>
-            <a:ext cx="731520" cy="731520"/>
-          </a:xfrm>
-          <a:prstGeom prst="ellipse">
-            <a:avLst/>
-          </a:prstGeom>
-          <a:solidFill>
-            <a:srgbClr val="F59E0B"/>
-          </a:solidFill>
-          <a:ln>
-            <a:noFill/>
-          </a:ln>
-        </p:spPr>
-        <p:style>
-          <a:lnRef idx="1">
-            <a:schemeClr val="accent1"/>
-          </a:lnRef>
-          <a:fillRef idx="3">
-            <a:schemeClr val="accent1"/>
-          </a:fillRef>
-          <a:effectRef idx="2">
-            <a:schemeClr val="accent1"/>
-          </a:effectRef>
-          <a:fontRef idx="minor">
-            <a:schemeClr val="lt1"/>
-          </a:fontRef>
-        </p:style>
-        <p:txBody>
-          <a:bodyPr rtlCol="0" anchor="ctr"/>
-          <a:lstStyle/>
-          <a:p>
-            <a:pPr algn="ctr"/>
-            <a:r>
-              <a:rPr sz="2400" b="1">
-                <a:solidFill>
-                  <a:srgbClr val="0B1220"/>
-                </a:solidFill>
-              </a:rPr>
-              <a:t>2</a:t>
-            </a:r>
-          </a:p>
-        </p:txBody>
-      </p:sp>
-      <p:sp>
-        <p:nvSpPr>
-          <p:cNvPr id="9" name="Rounded Rectangle 8"/>
-          <p:cNvSpPr/>
-          <p:nvPr/>
-        </p:nvSpPr>
-        <p:spPr>
-          <a:xfrm>
-            <a:off x="3566160" y="2103120"/>
-            <a:ext cx="2423160" cy="2880360"/>
-          </a:xfrm>
-          <a:prstGeom prst="roundRect">
-            <a:avLst/>
-          </a:prstGeom>
-          <a:solidFill>
-            <a:srgbClr val="152035"/>
-          </a:solidFill>
-          <a:ln>
-            <a:solidFill>
-              <a:srgbClr val="F59E0B"/>
-            </a:solidFill>
-          </a:ln>
-        </p:spPr>
-        <p:style>
-          <a:lnRef idx="1">
-            <a:schemeClr val="accent1"/>
-          </a:lnRef>
-          <a:fillRef idx="3">
-            <a:schemeClr val="accent1"/>
-          </a:fillRef>
-          <a:effectRef idx="2">
-            <a:schemeClr val="accent1"/>
-          </a:effectRef>
-          <a:fontRef idx="minor">
-            <a:schemeClr val="lt1"/>
-          </a:fontRef>
-        </p:style>
-        <p:txBody>
-          <a:bodyPr rtlCol="0" anchor="ctr"/>
-          <a:lstStyle/>
-          <a:p>
-            <a:pPr algn="ctr"/>
-          </a:p>
-        </p:txBody>
-      </p:sp>
-      <p:sp>
-        <p:nvSpPr>
-          <p:cNvPr id="10" name="TextBox 9"/>
-          <p:cNvSpPr txBox="1"/>
-          <p:nvPr/>
-        </p:nvSpPr>
-        <p:spPr>
-          <a:xfrm>
-            <a:off x="3703320" y="2304288"/>
-            <a:ext cx="2148840" cy="365760"/>
-          </a:xfrm>
-          <a:prstGeom prst="rect">
-            <a:avLst/>
-          </a:prstGeom>
-          <a:noFill/>
-        </p:spPr>
-        <p:txBody>
-          <a:bodyPr wrap="none">
-            <a:spAutoFit/>
-          </a:bodyPr>
-          <a:lstStyle/>
-          <a:p>
-            <a:pPr algn="ctr"/>
-            <a:r>
-              <a:rPr sz="1800" b="1">
+              </a:defRPr>
+            </a:pPr>
+            <a:r>
+              <a:t>학습 스크립트와 의존성 파일은 준비 완료</a:t>
+            </a:r>
+          </a:p>
+          <a:p>
+            <a:pPr>
+              <a:spcAft>
+                <a:spcPts val="1000"/>
+              </a:spcAft>
+              <a:defRPr sz="2200">
                 <a:solidFill>
                   <a:srgbClr val="F1F5F9"/>
                 </a:solidFill>
-              </a:rPr>
-              <a:t>평가셋 확대</a:t>
-            </a:r>
-          </a:p>
-        </p:txBody>
-      </p:sp>
-      <p:sp>
-        <p:nvSpPr>
-          <p:cNvPr id="11" name="TextBox 10"/>
-          <p:cNvSpPr txBox="1"/>
-          <p:nvPr/>
-        </p:nvSpPr>
-        <p:spPr>
-          <a:xfrm>
-            <a:off x="3712464" y="2743200"/>
-            <a:ext cx="2103120" cy="1737360"/>
-          </a:xfrm>
-          <a:prstGeom prst="rect">
-            <a:avLst/>
-          </a:prstGeom>
-          <a:noFill/>
-        </p:spPr>
-        <p:txBody>
-          <a:bodyPr wrap="none">
-            <a:spAutoFit/>
-          </a:bodyPr>
-          <a:lstStyle/>
-          <a:p>
-            <a:pPr algn="ctr"/>
-            <a:r>
-              <a:rPr sz="1400">
-                <a:solidFill>
-                  <a:srgbClr val="BFCDE0"/>
-                </a:solidFill>
-              </a:rPr>
-              <a:t>한글 중심으로 질문셋 확대
-영문/혼합 질의는 보조적으로 추가</a:t>
-            </a:r>
-          </a:p>
-        </p:txBody>
-      </p:sp>
-      <p:sp>
-        <p:nvSpPr>
-          <p:cNvPr id="12" name="Oval 11"/>
-          <p:cNvSpPr/>
-          <p:nvPr/>
-        </p:nvSpPr>
-        <p:spPr>
-          <a:xfrm>
-            <a:off x="7269480" y="1234440"/>
-            <a:ext cx="731520" cy="731520"/>
-          </a:xfrm>
-          <a:prstGeom prst="ellipse">
-            <a:avLst/>
-          </a:prstGeom>
-          <a:solidFill>
-            <a:srgbClr val="1AA39A"/>
-          </a:solidFill>
-          <a:ln>
-            <a:noFill/>
-          </a:ln>
-        </p:spPr>
-        <p:style>
-          <a:lnRef idx="1">
-            <a:schemeClr val="accent1"/>
-          </a:lnRef>
-          <a:fillRef idx="3">
-            <a:schemeClr val="accent1"/>
-          </a:fillRef>
-          <a:effectRef idx="2">
-            <a:schemeClr val="accent1"/>
-          </a:effectRef>
-          <a:fontRef idx="minor">
-            <a:schemeClr val="lt1"/>
-          </a:fontRef>
-        </p:style>
-        <p:txBody>
-          <a:bodyPr rtlCol="0" anchor="ctr"/>
-          <a:lstStyle/>
-          <a:p>
-            <a:pPr algn="ctr"/>
-            <a:r>
-              <a:rPr sz="2400" b="1">
-                <a:solidFill>
-                  <a:srgbClr val="0B1220"/>
-                </a:solidFill>
-              </a:rPr>
-              <a:t>3</a:t>
-            </a:r>
-          </a:p>
-        </p:txBody>
-      </p:sp>
-      <p:sp>
-        <p:nvSpPr>
-          <p:cNvPr id="13" name="Rounded Rectangle 12"/>
-          <p:cNvSpPr/>
-          <p:nvPr/>
-        </p:nvSpPr>
-        <p:spPr>
-          <a:xfrm>
-            <a:off x="6400800" y="2103120"/>
-            <a:ext cx="2423160" cy="2880360"/>
-          </a:xfrm>
-          <a:prstGeom prst="roundRect">
-            <a:avLst/>
-          </a:prstGeom>
-          <a:solidFill>
-            <a:srgbClr val="152035"/>
-          </a:solidFill>
-          <a:ln>
-            <a:solidFill>
-              <a:srgbClr val="1AA39A"/>
-            </a:solidFill>
-          </a:ln>
-        </p:spPr>
-        <p:style>
-          <a:lnRef idx="1">
-            <a:schemeClr val="accent1"/>
-          </a:lnRef>
-          <a:fillRef idx="3">
-            <a:schemeClr val="accent1"/>
-          </a:fillRef>
-          <a:effectRef idx="2">
-            <a:schemeClr val="accent1"/>
-          </a:effectRef>
-          <a:fontRef idx="minor">
-            <a:schemeClr val="lt1"/>
-          </a:fontRef>
-        </p:style>
-        <p:txBody>
-          <a:bodyPr rtlCol="0" anchor="ctr"/>
-          <a:lstStyle/>
-          <a:p>
-            <a:pPr algn="ctr"/>
-          </a:p>
-        </p:txBody>
-      </p:sp>
-      <p:sp>
-        <p:nvSpPr>
-          <p:cNvPr id="14" name="TextBox 13"/>
-          <p:cNvSpPr txBox="1"/>
-          <p:nvPr/>
-        </p:nvSpPr>
-        <p:spPr>
-          <a:xfrm>
-            <a:off x="6537960" y="2304288"/>
-            <a:ext cx="2148840" cy="365760"/>
-          </a:xfrm>
-          <a:prstGeom prst="rect">
-            <a:avLst/>
-          </a:prstGeom>
-          <a:noFill/>
-        </p:spPr>
-        <p:txBody>
-          <a:bodyPr wrap="none">
-            <a:spAutoFit/>
-          </a:bodyPr>
-          <a:lstStyle/>
-          <a:p>
-            <a:pPr algn="ctr"/>
-            <a:r>
-              <a:rPr sz="1800" b="1">
+              </a:defRPr>
+            </a:pPr>
+            <a:r>
+              <a:t>학습 데이터셋은 25개 샘플까지 확장 완료</a:t>
+            </a:r>
+          </a:p>
+          <a:p>
+            <a:pPr>
+              <a:spcAft>
+                <a:spcPts val="1000"/>
+              </a:spcAft>
+              <a:defRPr sz="2200">
                 <a:solidFill>
                   <a:srgbClr val="F1F5F9"/>
                 </a:solidFill>
-              </a:rPr>
-              <a:t>QLoRA 준비 강화</a:t>
-            </a:r>
-          </a:p>
-        </p:txBody>
-      </p:sp>
-      <p:sp>
-        <p:nvSpPr>
-          <p:cNvPr id="15" name="TextBox 14"/>
-          <p:cNvSpPr txBox="1"/>
-          <p:nvPr/>
-        </p:nvSpPr>
-        <p:spPr>
-          <a:xfrm>
-            <a:off x="6547104" y="2743200"/>
-            <a:ext cx="2103120" cy="1737360"/>
-          </a:xfrm>
-          <a:prstGeom prst="rect">
-            <a:avLst/>
-          </a:prstGeom>
-          <a:noFill/>
-        </p:spPr>
-        <p:txBody>
-          <a:bodyPr wrap="none">
-            <a:spAutoFit/>
-          </a:bodyPr>
-          <a:lstStyle/>
-          <a:p>
-            <a:pPr algn="ctr"/>
-            <a:r>
-              <a:rPr sz="1400">
-                <a:solidFill>
-                  <a:srgbClr val="BFCDE0"/>
-                </a:solidFill>
-              </a:rPr>
-              <a:t>학습 데이터 25 -&gt; 40+ 확대
-강한 정답/거절/비교 케이스 보강</a:t>
-            </a:r>
-          </a:p>
-        </p:txBody>
-      </p:sp>
-      <p:sp>
-        <p:nvSpPr>
-          <p:cNvPr id="16" name="Oval 15"/>
-          <p:cNvSpPr/>
-          <p:nvPr/>
-        </p:nvSpPr>
-        <p:spPr>
-          <a:xfrm>
-            <a:off x="10104120" y="1234440"/>
-            <a:ext cx="731520" cy="731520"/>
-          </a:xfrm>
-          <a:prstGeom prst="ellipse">
-            <a:avLst/>
-          </a:prstGeom>
-          <a:solidFill>
-            <a:srgbClr val="F59E0B"/>
-          </a:solidFill>
-          <a:ln>
-            <a:noFill/>
-          </a:ln>
-        </p:spPr>
-        <p:style>
-          <a:lnRef idx="1">
-            <a:schemeClr val="accent1"/>
-          </a:lnRef>
-          <a:fillRef idx="3">
-            <a:schemeClr val="accent1"/>
-          </a:fillRef>
-          <a:effectRef idx="2">
-            <a:schemeClr val="accent1"/>
-          </a:effectRef>
-          <a:fontRef idx="minor">
-            <a:schemeClr val="lt1"/>
-          </a:fontRef>
-        </p:style>
-        <p:txBody>
-          <a:bodyPr rtlCol="0" anchor="ctr"/>
-          <a:lstStyle/>
-          <a:p>
-            <a:pPr algn="ctr"/>
-            <a:r>
-              <a:rPr sz="2400" b="1">
-                <a:solidFill>
-                  <a:srgbClr val="0B1220"/>
-                </a:solidFill>
-              </a:rPr>
-              <a:t>4</a:t>
-            </a:r>
-          </a:p>
-        </p:txBody>
-      </p:sp>
-      <p:sp>
-        <p:nvSpPr>
-          <p:cNvPr id="17" name="Rounded Rectangle 16"/>
-          <p:cNvSpPr/>
-          <p:nvPr/>
-        </p:nvSpPr>
-        <p:spPr>
-          <a:xfrm>
-            <a:off x="9235440" y="2103120"/>
-            <a:ext cx="2423160" cy="2880360"/>
-          </a:xfrm>
-          <a:prstGeom prst="roundRect">
-            <a:avLst/>
-          </a:prstGeom>
-          <a:solidFill>
-            <a:srgbClr val="152035"/>
-          </a:solidFill>
-          <a:ln>
-            <a:solidFill>
-              <a:srgbClr val="F59E0B"/>
-            </a:solidFill>
-          </a:ln>
-        </p:spPr>
-        <p:style>
-          <a:lnRef idx="1">
-            <a:schemeClr val="accent1"/>
-          </a:lnRef>
-          <a:fillRef idx="3">
-            <a:schemeClr val="accent1"/>
-          </a:fillRef>
-          <a:effectRef idx="2">
-            <a:schemeClr val="accent1"/>
-          </a:effectRef>
-          <a:fontRef idx="minor">
-            <a:schemeClr val="lt1"/>
-          </a:fontRef>
-        </p:style>
-        <p:txBody>
-          <a:bodyPr rtlCol="0" anchor="ctr"/>
-          <a:lstStyle/>
-          <a:p>
-            <a:pPr algn="ctr"/>
-          </a:p>
-        </p:txBody>
-      </p:sp>
-      <p:sp>
-        <p:nvSpPr>
-          <p:cNvPr id="18" name="TextBox 17"/>
-          <p:cNvSpPr txBox="1"/>
-          <p:nvPr/>
-        </p:nvSpPr>
-        <p:spPr>
-          <a:xfrm>
-            <a:off x="9372600" y="2304288"/>
-            <a:ext cx="2148840" cy="365760"/>
-          </a:xfrm>
-          <a:prstGeom prst="rect">
-            <a:avLst/>
-          </a:prstGeom>
-          <a:noFill/>
-        </p:spPr>
-        <p:txBody>
-          <a:bodyPr wrap="none">
-            <a:spAutoFit/>
-          </a:bodyPr>
-          <a:lstStyle/>
-          <a:p>
-            <a:pPr algn="ctr"/>
-            <a:r>
-              <a:rPr sz="1800" b="1">
+              </a:defRPr>
+            </a:pPr>
+            <a:r>
+              <a:t>현재 비중은 한국어 중심(20) + 영어 보조(5)</a:t>
+            </a:r>
+          </a:p>
+          <a:p>
+            <a:pPr>
+              <a:spcAft>
+                <a:spcPts val="1000"/>
+              </a:spcAft>
+              <a:defRPr sz="2200">
                 <a:solidFill>
                   <a:srgbClr val="F1F5F9"/>
                 </a:solidFill>
-              </a:rPr>
-              <a:t>첫 학습 실행</a:t>
-            </a:r>
-          </a:p>
-        </p:txBody>
-      </p:sp>
-      <p:sp>
-        <p:nvSpPr>
-          <p:cNvPr id="19" name="TextBox 18"/>
-          <p:cNvSpPr txBox="1"/>
-          <p:nvPr/>
-        </p:nvSpPr>
-        <p:spPr>
-          <a:xfrm>
-            <a:off x="9381744" y="2743200"/>
-            <a:ext cx="2103120" cy="1737360"/>
-          </a:xfrm>
-          <a:prstGeom prst="rect">
-            <a:avLst/>
-          </a:prstGeom>
-          <a:noFill/>
-        </p:spPr>
-        <p:txBody>
-          <a:bodyPr wrap="none">
-            <a:spAutoFit/>
-          </a:bodyPr>
-          <a:lstStyle/>
-          <a:p>
-            <a:pPr algn="ctr"/>
-            <a:r>
-              <a:rPr sz="1400">
-                <a:solidFill>
-                  <a:srgbClr val="BFCDE0"/>
-                </a:solidFill>
-              </a:rPr>
-              <a:t>기준 모델 고정 후
-첫 QLoRA adapter 학습 및 비교</a:t>
+              </a:defRPr>
+            </a:pPr>
+            <a:r>
+              <a:t>다음 단계는 비교/거절/영문 케이스를 조금 더 늘린 뒤 첫 adapter 학습 실행</a:t>
             </a:r>
           </a:p>
         </p:txBody>
@@ -6545,21 +7106,72 @@
                   <a:srgbClr val="F1F5F9"/>
                 </a:solidFill>
               </a:rPr>
-              <a:t>결론</a:t>
-            </a:r>
-          </a:p>
-        </p:txBody>
-      </p:sp>
-      <p:sp>
-        <p:nvSpPr>
-          <p:cNvPr id="4" name="Rounded Rectangle 3"/>
+              <a:t>다음 단계 제안</a:t>
+            </a:r>
+          </a:p>
+        </p:txBody>
+      </p:sp>
+      <p:sp>
+        <p:nvSpPr>
+          <p:cNvPr id="4" name="Oval 3"/>
           <p:cNvSpPr/>
           <p:nvPr/>
         </p:nvSpPr>
         <p:spPr>
           <a:xfrm>
-            <a:off x="822960" y="1463040"/>
-            <a:ext cx="10515600" cy="4389120"/>
+            <a:off x="1600200" y="1234440"/>
+            <a:ext cx="731520" cy="731520"/>
+          </a:xfrm>
+          <a:prstGeom prst="ellipse">
+            <a:avLst/>
+          </a:prstGeom>
+          <a:solidFill>
+            <a:srgbClr val="1AA39A"/>
+          </a:solidFill>
+          <a:ln>
+            <a:noFill/>
+          </a:ln>
+        </p:spPr>
+        <p:style>
+          <a:lnRef idx="1">
+            <a:schemeClr val="accent1"/>
+          </a:lnRef>
+          <a:fillRef idx="3">
+            <a:schemeClr val="accent1"/>
+          </a:fillRef>
+          <a:effectRef idx="2">
+            <a:schemeClr val="accent1"/>
+          </a:effectRef>
+          <a:fontRef idx="minor">
+            <a:schemeClr val="lt1"/>
+          </a:fontRef>
+        </p:style>
+        <p:txBody>
+          <a:bodyPr rtlCol="0" anchor="ctr"/>
+          <a:lstStyle/>
+          <a:p>
+            <a:pPr algn="ctr"/>
+            <a:r>
+              <a:rPr sz="2400" b="1">
+                <a:solidFill>
+                  <a:srgbClr val="0B1220"/>
+                </a:solidFill>
+              </a:rPr>
+              <a:t>1</a:t>
+            </a:r>
+          </a:p>
+        </p:txBody>
+      </p:sp>
+      <p:sp>
+        <p:nvSpPr>
+          <p:cNvPr id="5" name="Rounded Rectangle 4"/>
+          <p:cNvSpPr/>
+          <p:nvPr/>
+        </p:nvSpPr>
+        <p:spPr>
+          <a:xfrm>
+            <a:off x="731520" y="2103120"/>
+            <a:ext cx="2423160" cy="2880360"/>
           </a:xfrm>
           <a:prstGeom prst="roundRect">
             <a:avLst/>
@@ -6597,14 +7209,14 @@
       </p:sp>
       <p:sp>
         <p:nvSpPr>
-          <p:cNvPr id="5" name="TextBox 4"/>
+          <p:cNvPr id="6" name="TextBox 5"/>
           <p:cNvSpPr txBox="1"/>
           <p:nvPr/>
         </p:nvSpPr>
         <p:spPr>
           <a:xfrm>
-            <a:off x="1143000" y="1828800"/>
-            <a:ext cx="9875520" cy="3566160"/>
+            <a:off x="868680" y="2304288"/>
+            <a:ext cx="2148840" cy="365760"/>
           </a:xfrm>
           <a:prstGeom prst="rect">
             <a:avLst/>
@@ -6617,63 +7229,544 @@
           </a:bodyPr>
           <a:lstStyle/>
           <a:p>
-            <a:pPr>
-              <a:spcAft>
-                <a:spcPts val="1200"/>
-              </a:spcAft>
-              <a:defRPr sz="2200">
+            <a:pPr algn="ctr"/>
+            <a:r>
+              <a:rPr sz="1800" b="1">
                 <a:solidFill>
                   <a:srgbClr val="F1F5F9"/>
                 </a:solidFill>
-              </a:defRPr>
-            </a:pPr>
-            <a:r>
-              <a:t>현재 프로젝트는 초기 프로토타입 단계를 넘어서, 문서 기반 RAG 제품의 핵심 구조를 확보한 상태입니다.</a:t>
-            </a:r>
-          </a:p>
-          <a:p>
-            <a:pPr>
-              <a:spcAft>
-                <a:spcPts val="1200"/>
-              </a:spcAft>
-              <a:defRPr sz="1800">
+              </a:rPr>
+              <a:t>검색/비교 안정화</a:t>
+            </a:r>
+          </a:p>
+        </p:txBody>
+      </p:sp>
+      <p:sp>
+        <p:nvSpPr>
+          <p:cNvPr id="7" name="TextBox 6"/>
+          <p:cNvSpPr txBox="1"/>
+          <p:nvPr/>
+        </p:nvSpPr>
+        <p:spPr>
+          <a:xfrm>
+            <a:off x="877824" y="2743200"/>
+            <a:ext cx="2103120" cy="1737360"/>
+          </a:xfrm>
+          <a:prstGeom prst="rect">
+            <a:avLst/>
+          </a:prstGeom>
+          <a:noFill/>
+        </p:spPr>
+        <p:txBody>
+          <a:bodyPr wrap="none">
+            <a:spAutoFit/>
+          </a:bodyPr>
+          <a:lstStyle/>
+          <a:p>
+            <a:pPr algn="ctr"/>
+            <a:r>
+              <a:rPr sz="1400">
                 <a:solidFill>
                   <a:srgbClr val="BFCDE0"/>
                 </a:solidFill>
-              </a:defRPr>
-            </a:pPr>
-            <a:r>
-              <a:t>특히 업로드 문서 처리, 문서 스코프 QA, 벤치마크 기반 평가, 비교형 질문 지원까지 연결되었습니다.</a:t>
-            </a:r>
-          </a:p>
-          <a:p>
-            <a:pPr>
-              <a:spcAft>
-                <a:spcPts val="1200"/>
-              </a:spcAft>
-              <a:defRPr sz="1800">
+              </a:rPr>
+              <a:t>비교형 PDF 벤치마크 실행
+비교 응답 품질 점검 및 보정</a:t>
+            </a:r>
+          </a:p>
+        </p:txBody>
+      </p:sp>
+      <p:sp>
+        <p:nvSpPr>
+          <p:cNvPr id="8" name="Oval 7"/>
+          <p:cNvSpPr/>
+          <p:nvPr/>
+        </p:nvSpPr>
+        <p:spPr>
+          <a:xfrm>
+            <a:off x="4434840" y="1234440"/>
+            <a:ext cx="731520" cy="731520"/>
+          </a:xfrm>
+          <a:prstGeom prst="ellipse">
+            <a:avLst/>
+          </a:prstGeom>
+          <a:solidFill>
+            <a:srgbClr val="F59E0B"/>
+          </a:solidFill>
+          <a:ln>
+            <a:noFill/>
+          </a:ln>
+        </p:spPr>
+        <p:style>
+          <a:lnRef idx="1">
+            <a:schemeClr val="accent1"/>
+          </a:lnRef>
+          <a:fillRef idx="3">
+            <a:schemeClr val="accent1"/>
+          </a:fillRef>
+          <a:effectRef idx="2">
+            <a:schemeClr val="accent1"/>
+          </a:effectRef>
+          <a:fontRef idx="minor">
+            <a:schemeClr val="lt1"/>
+          </a:fontRef>
+        </p:style>
+        <p:txBody>
+          <a:bodyPr rtlCol="0" anchor="ctr"/>
+          <a:lstStyle/>
+          <a:p>
+            <a:pPr algn="ctr"/>
+            <a:r>
+              <a:rPr sz="2400" b="1">
+                <a:solidFill>
+                  <a:srgbClr val="0B1220"/>
+                </a:solidFill>
+              </a:rPr>
+              <a:t>2</a:t>
+            </a:r>
+          </a:p>
+        </p:txBody>
+      </p:sp>
+      <p:sp>
+        <p:nvSpPr>
+          <p:cNvPr id="9" name="Rounded Rectangle 8"/>
+          <p:cNvSpPr/>
+          <p:nvPr/>
+        </p:nvSpPr>
+        <p:spPr>
+          <a:xfrm>
+            <a:off x="3566160" y="2103120"/>
+            <a:ext cx="2423160" cy="2880360"/>
+          </a:xfrm>
+          <a:prstGeom prst="roundRect">
+            <a:avLst/>
+          </a:prstGeom>
+          <a:solidFill>
+            <a:srgbClr val="152035"/>
+          </a:solidFill>
+          <a:ln>
+            <a:solidFill>
+              <a:srgbClr val="F59E0B"/>
+            </a:solidFill>
+          </a:ln>
+        </p:spPr>
+        <p:style>
+          <a:lnRef idx="1">
+            <a:schemeClr val="accent1"/>
+          </a:lnRef>
+          <a:fillRef idx="3">
+            <a:schemeClr val="accent1"/>
+          </a:fillRef>
+          <a:effectRef idx="2">
+            <a:schemeClr val="accent1"/>
+          </a:effectRef>
+          <a:fontRef idx="minor">
+            <a:schemeClr val="lt1"/>
+          </a:fontRef>
+        </p:style>
+        <p:txBody>
+          <a:bodyPr rtlCol="0" anchor="ctr"/>
+          <a:lstStyle/>
+          <a:p>
+            <a:pPr algn="ctr"/>
+          </a:p>
+        </p:txBody>
+      </p:sp>
+      <p:sp>
+        <p:nvSpPr>
+          <p:cNvPr id="10" name="TextBox 9"/>
+          <p:cNvSpPr txBox="1"/>
+          <p:nvPr/>
+        </p:nvSpPr>
+        <p:spPr>
+          <a:xfrm>
+            <a:off x="3703320" y="2304288"/>
+            <a:ext cx="2148840" cy="365760"/>
+          </a:xfrm>
+          <a:prstGeom prst="rect">
+            <a:avLst/>
+          </a:prstGeom>
+          <a:noFill/>
+        </p:spPr>
+        <p:txBody>
+          <a:bodyPr wrap="none">
+            <a:spAutoFit/>
+          </a:bodyPr>
+          <a:lstStyle/>
+          <a:p>
+            <a:pPr algn="ctr"/>
+            <a:r>
+              <a:rPr sz="1800" b="1">
+                <a:solidFill>
+                  <a:srgbClr val="F1F5F9"/>
+                </a:solidFill>
+              </a:rPr>
+              <a:t>평가셋 확대</a:t>
+            </a:r>
+          </a:p>
+        </p:txBody>
+      </p:sp>
+      <p:sp>
+        <p:nvSpPr>
+          <p:cNvPr id="11" name="TextBox 10"/>
+          <p:cNvSpPr txBox="1"/>
+          <p:nvPr/>
+        </p:nvSpPr>
+        <p:spPr>
+          <a:xfrm>
+            <a:off x="3712464" y="2743200"/>
+            <a:ext cx="2103120" cy="1737360"/>
+          </a:xfrm>
+          <a:prstGeom prst="rect">
+            <a:avLst/>
+          </a:prstGeom>
+          <a:noFill/>
+        </p:spPr>
+        <p:txBody>
+          <a:bodyPr wrap="none">
+            <a:spAutoFit/>
+          </a:bodyPr>
+          <a:lstStyle/>
+          <a:p>
+            <a:pPr algn="ctr"/>
+            <a:r>
+              <a:rPr sz="1400">
                 <a:solidFill>
                   <a:srgbClr val="BFCDE0"/>
                 </a:solidFill>
-              </a:defRPr>
-            </a:pPr>
-            <a:r>
-              <a:t>다음 핵심 과제는 한글 중심 평가셋 확대와 QLoRA 학습 루프 시작입니다.</a:t>
-            </a:r>
-          </a:p>
-          <a:p>
-            <a:pPr>
-              <a:spcAft>
-                <a:spcPts val="1200"/>
-              </a:spcAft>
-              <a:defRPr sz="1800">
+              </a:rPr>
+              <a:t>한글 중심으로 질문셋 확대
+영문/혼합 질의는 보조적으로 추가</a:t>
+            </a:r>
+          </a:p>
+        </p:txBody>
+      </p:sp>
+      <p:sp>
+        <p:nvSpPr>
+          <p:cNvPr id="12" name="Oval 11"/>
+          <p:cNvSpPr/>
+          <p:nvPr/>
+        </p:nvSpPr>
+        <p:spPr>
+          <a:xfrm>
+            <a:off x="7269480" y="1234440"/>
+            <a:ext cx="731520" cy="731520"/>
+          </a:xfrm>
+          <a:prstGeom prst="ellipse">
+            <a:avLst/>
+          </a:prstGeom>
+          <a:solidFill>
+            <a:srgbClr val="1AA39A"/>
+          </a:solidFill>
+          <a:ln>
+            <a:noFill/>
+          </a:ln>
+        </p:spPr>
+        <p:style>
+          <a:lnRef idx="1">
+            <a:schemeClr val="accent1"/>
+          </a:lnRef>
+          <a:fillRef idx="3">
+            <a:schemeClr val="accent1"/>
+          </a:fillRef>
+          <a:effectRef idx="2">
+            <a:schemeClr val="accent1"/>
+          </a:effectRef>
+          <a:fontRef idx="minor">
+            <a:schemeClr val="lt1"/>
+          </a:fontRef>
+        </p:style>
+        <p:txBody>
+          <a:bodyPr rtlCol="0" anchor="ctr"/>
+          <a:lstStyle/>
+          <a:p>
+            <a:pPr algn="ctr"/>
+            <a:r>
+              <a:rPr sz="2400" b="1">
+                <a:solidFill>
+                  <a:srgbClr val="0B1220"/>
+                </a:solidFill>
+              </a:rPr>
+              <a:t>3</a:t>
+            </a:r>
+          </a:p>
+        </p:txBody>
+      </p:sp>
+      <p:sp>
+        <p:nvSpPr>
+          <p:cNvPr id="13" name="Rounded Rectangle 12"/>
+          <p:cNvSpPr/>
+          <p:nvPr/>
+        </p:nvSpPr>
+        <p:spPr>
+          <a:xfrm>
+            <a:off x="6400800" y="2103120"/>
+            <a:ext cx="2423160" cy="2880360"/>
+          </a:xfrm>
+          <a:prstGeom prst="roundRect">
+            <a:avLst/>
+          </a:prstGeom>
+          <a:solidFill>
+            <a:srgbClr val="152035"/>
+          </a:solidFill>
+          <a:ln>
+            <a:solidFill>
+              <a:srgbClr val="1AA39A"/>
+            </a:solidFill>
+          </a:ln>
+        </p:spPr>
+        <p:style>
+          <a:lnRef idx="1">
+            <a:schemeClr val="accent1"/>
+          </a:lnRef>
+          <a:fillRef idx="3">
+            <a:schemeClr val="accent1"/>
+          </a:fillRef>
+          <a:effectRef idx="2">
+            <a:schemeClr val="accent1"/>
+          </a:effectRef>
+          <a:fontRef idx="minor">
+            <a:schemeClr val="lt1"/>
+          </a:fontRef>
+        </p:style>
+        <p:txBody>
+          <a:bodyPr rtlCol="0" anchor="ctr"/>
+          <a:lstStyle/>
+          <a:p>
+            <a:pPr algn="ctr"/>
+          </a:p>
+        </p:txBody>
+      </p:sp>
+      <p:sp>
+        <p:nvSpPr>
+          <p:cNvPr id="14" name="TextBox 13"/>
+          <p:cNvSpPr txBox="1"/>
+          <p:nvPr/>
+        </p:nvSpPr>
+        <p:spPr>
+          <a:xfrm>
+            <a:off x="6537960" y="2304288"/>
+            <a:ext cx="2148840" cy="365760"/>
+          </a:xfrm>
+          <a:prstGeom prst="rect">
+            <a:avLst/>
+          </a:prstGeom>
+          <a:noFill/>
+        </p:spPr>
+        <p:txBody>
+          <a:bodyPr wrap="none">
+            <a:spAutoFit/>
+          </a:bodyPr>
+          <a:lstStyle/>
+          <a:p>
+            <a:pPr algn="ctr"/>
+            <a:r>
+              <a:rPr sz="1800" b="1">
+                <a:solidFill>
+                  <a:srgbClr val="F1F5F9"/>
+                </a:solidFill>
+              </a:rPr>
+              <a:t>QLoRA 준비 강화</a:t>
+            </a:r>
+          </a:p>
+        </p:txBody>
+      </p:sp>
+      <p:sp>
+        <p:nvSpPr>
+          <p:cNvPr id="15" name="TextBox 14"/>
+          <p:cNvSpPr txBox="1"/>
+          <p:nvPr/>
+        </p:nvSpPr>
+        <p:spPr>
+          <a:xfrm>
+            <a:off x="6547104" y="2743200"/>
+            <a:ext cx="2103120" cy="1737360"/>
+          </a:xfrm>
+          <a:prstGeom prst="rect">
+            <a:avLst/>
+          </a:prstGeom>
+          <a:noFill/>
+        </p:spPr>
+        <p:txBody>
+          <a:bodyPr wrap="none">
+            <a:spAutoFit/>
+          </a:bodyPr>
+          <a:lstStyle/>
+          <a:p>
+            <a:pPr algn="ctr"/>
+            <a:r>
+              <a:rPr sz="1400">
                 <a:solidFill>
                   <a:srgbClr val="BFCDE0"/>
                 </a:solidFill>
-              </a:defRPr>
-            </a:pPr>
-            <a:r>
-              <a:t>즉, 지금은 기능 추가보다 '품질 측정 -&gt; 데이터 확장 -&gt; 미세조정'으로 넘어가야 하는 시점입니다.</a:t>
+              </a:rPr>
+              <a:t>학습 데이터 25 -&gt; 40+ 확대
+강한 정답/거절/비교 케이스 보강</a:t>
+            </a:r>
+          </a:p>
+        </p:txBody>
+      </p:sp>
+      <p:sp>
+        <p:nvSpPr>
+          <p:cNvPr id="16" name="Oval 15"/>
+          <p:cNvSpPr/>
+          <p:nvPr/>
+        </p:nvSpPr>
+        <p:spPr>
+          <a:xfrm>
+            <a:off x="10104120" y="1234440"/>
+            <a:ext cx="731520" cy="731520"/>
+          </a:xfrm>
+          <a:prstGeom prst="ellipse">
+            <a:avLst/>
+          </a:prstGeom>
+          <a:solidFill>
+            <a:srgbClr val="F59E0B"/>
+          </a:solidFill>
+          <a:ln>
+            <a:noFill/>
+          </a:ln>
+        </p:spPr>
+        <p:style>
+          <a:lnRef idx="1">
+            <a:schemeClr val="accent1"/>
+          </a:lnRef>
+          <a:fillRef idx="3">
+            <a:schemeClr val="accent1"/>
+          </a:fillRef>
+          <a:effectRef idx="2">
+            <a:schemeClr val="accent1"/>
+          </a:effectRef>
+          <a:fontRef idx="minor">
+            <a:schemeClr val="lt1"/>
+          </a:fontRef>
+        </p:style>
+        <p:txBody>
+          <a:bodyPr rtlCol="0" anchor="ctr"/>
+          <a:lstStyle/>
+          <a:p>
+            <a:pPr algn="ctr"/>
+            <a:r>
+              <a:rPr sz="2400" b="1">
+                <a:solidFill>
+                  <a:srgbClr val="0B1220"/>
+                </a:solidFill>
+              </a:rPr>
+              <a:t>4</a:t>
+            </a:r>
+          </a:p>
+        </p:txBody>
+      </p:sp>
+      <p:sp>
+        <p:nvSpPr>
+          <p:cNvPr id="17" name="Rounded Rectangle 16"/>
+          <p:cNvSpPr/>
+          <p:nvPr/>
+        </p:nvSpPr>
+        <p:spPr>
+          <a:xfrm>
+            <a:off x="9235440" y="2103120"/>
+            <a:ext cx="2423160" cy="2880360"/>
+          </a:xfrm>
+          <a:prstGeom prst="roundRect">
+            <a:avLst/>
+          </a:prstGeom>
+          <a:solidFill>
+            <a:srgbClr val="152035"/>
+          </a:solidFill>
+          <a:ln>
+            <a:solidFill>
+              <a:srgbClr val="F59E0B"/>
+            </a:solidFill>
+          </a:ln>
+        </p:spPr>
+        <p:style>
+          <a:lnRef idx="1">
+            <a:schemeClr val="accent1"/>
+          </a:lnRef>
+          <a:fillRef idx="3">
+            <a:schemeClr val="accent1"/>
+          </a:fillRef>
+          <a:effectRef idx="2">
+            <a:schemeClr val="accent1"/>
+          </a:effectRef>
+          <a:fontRef idx="minor">
+            <a:schemeClr val="lt1"/>
+          </a:fontRef>
+        </p:style>
+        <p:txBody>
+          <a:bodyPr rtlCol="0" anchor="ctr"/>
+          <a:lstStyle/>
+          <a:p>
+            <a:pPr algn="ctr"/>
+          </a:p>
+        </p:txBody>
+      </p:sp>
+      <p:sp>
+        <p:nvSpPr>
+          <p:cNvPr id="18" name="TextBox 17"/>
+          <p:cNvSpPr txBox="1"/>
+          <p:nvPr/>
+        </p:nvSpPr>
+        <p:spPr>
+          <a:xfrm>
+            <a:off x="9372600" y="2304288"/>
+            <a:ext cx="2148840" cy="365760"/>
+          </a:xfrm>
+          <a:prstGeom prst="rect">
+            <a:avLst/>
+          </a:prstGeom>
+          <a:noFill/>
+        </p:spPr>
+        <p:txBody>
+          <a:bodyPr wrap="none">
+            <a:spAutoFit/>
+          </a:bodyPr>
+          <a:lstStyle/>
+          <a:p>
+            <a:pPr algn="ctr"/>
+            <a:r>
+              <a:rPr sz="1800" b="1">
+                <a:solidFill>
+                  <a:srgbClr val="F1F5F9"/>
+                </a:solidFill>
+              </a:rPr>
+              <a:t>첫 학습 실행</a:t>
+            </a:r>
+          </a:p>
+        </p:txBody>
+      </p:sp>
+      <p:sp>
+        <p:nvSpPr>
+          <p:cNvPr id="19" name="TextBox 18"/>
+          <p:cNvSpPr txBox="1"/>
+          <p:nvPr/>
+        </p:nvSpPr>
+        <p:spPr>
+          <a:xfrm>
+            <a:off x="9381744" y="2743200"/>
+            <a:ext cx="2103120" cy="1737360"/>
+          </a:xfrm>
+          <a:prstGeom prst="rect">
+            <a:avLst/>
+          </a:prstGeom>
+          <a:noFill/>
+        </p:spPr>
+        <p:txBody>
+          <a:bodyPr wrap="none">
+            <a:spAutoFit/>
+          </a:bodyPr>
+          <a:lstStyle/>
+          <a:p>
+            <a:pPr algn="ctr"/>
+            <a:r>
+              <a:rPr sz="1400">
+                <a:solidFill>
+                  <a:srgbClr val="BFCDE0"/>
+                </a:solidFill>
+              </a:rPr>
+              <a:t>기준 모델 고정 후
+첫 QLoRA adapter 학습 및 비교</a:t>
             </a:r>
           </a:p>
         </p:txBody>
